--- a/assets/images/Rota-TechX Abstract.pptx
+++ b/assets/images/Rota-TechX Abstract.pptx
@@ -1,33 +1,36 @@
 
 <file path=ppt/presentation.xml><?xml version="1.0" encoding="utf-8"?>
-<p:presentation xmlns:a="http://schemas.openxmlformats.org/drawingml/2006/main" xmlns:r="http://schemas.openxmlformats.org/officeDocument/2006/relationships" xmlns:p="http://schemas.openxmlformats.org/presentationml/2006/main" saveSubsetFonts="1" embedTrueTypeFonts="true">
+<p:presentation xmlns:a="http://schemas.openxmlformats.org/drawingml/2006/main" xmlns:r="http://schemas.openxmlformats.org/officeDocument/2006/relationships" xmlns:p="http://schemas.openxmlformats.org/presentationml/2006/main" embedTrueTypeFonts="1" saveSubsetFonts="1">
   <p:sldMasterIdLst>
     <p:sldMasterId id="2147483648" r:id="rId1"/>
   </p:sldMasterIdLst>
   <p:sldIdLst>
-    <p:sldId id="256" r:id="rId6"/>
-    <p:sldId id="257" r:id="rId7"/>
-    <p:sldId id="258" r:id="rId8"/>
-    <p:sldId id="259" r:id="rId9"/>
-    <p:sldId id="260" r:id="rId10"/>
-    <p:sldId id="261" r:id="rId11"/>
-    <p:sldId id="262" r:id="rId12"/>
-    <p:sldId id="263" r:id="rId13"/>
+    <p:sldId id="256" r:id="rId2"/>
+    <p:sldId id="257" r:id="rId3"/>
+    <p:sldId id="258" r:id="rId4"/>
+    <p:sldId id="259" r:id="rId5"/>
+    <p:sldId id="260" r:id="rId6"/>
+    <p:sldId id="261" r:id="rId7"/>
+    <p:sldId id="262" r:id="rId8"/>
+    <p:sldId id="263" r:id="rId9"/>
   </p:sldIdLst>
   <p:sldSz cx="18288000" cy="10287000"/>
   <p:notesSz cx="6858000" cy="9144000"/>
   <p:embeddedFontLst>
     <p:embeddedFont>
-      <p:font typeface="Neue Montreal Bold" charset="1" panose="00000800000000000000"/>
-      <p:regular r:id="rId14"/>
+      <p:font typeface="Canva Sans Bold" panose="020B0604020202020204" charset="0"/>
+      <p:regular r:id="rId10"/>
     </p:embeddedFont>
     <p:embeddedFont>
-      <p:font typeface="Canva Sans Bold" charset="1" panose="020B0803030501040103"/>
-      <p:regular r:id="rId15"/>
+      <p:font typeface="Neue Montreal" panose="00000500000000000000" pitchFamily="50" charset="0"/>
+      <p:regular r:id="rId11"/>
+      <p:bold r:id="rId12"/>
+      <p:italic r:id="rId13"/>
     </p:embeddedFont>
     <p:embeddedFont>
-      <p:font typeface="Neue Montreal" charset="1" panose="00000500000000000000"/>
-      <p:regular r:id="rId16"/>
+      <p:font typeface="Neue Montreal Bold" panose="00000800000000000000" pitchFamily="50" charset="0"/>
+      <p:regular r:id="rId14"/>
+      <p:boldItalic r:id="rId15"/>
     </p:embeddedFont>
   </p:embeddedFontLst>
   <p:defaultTextStyle>
@@ -125,6 +128,22 @@
       </a:defRPr>
     </a:lvl9pPr>
   </p:defaultTextStyle>
+  <p:extLst>
+    <p:ext uri="{EFAFB233-063F-42B5-8137-9DF3F51BA10A}">
+      <p15:sldGuideLst xmlns:p15="http://schemas.microsoft.com/office/powerpoint/2012/main">
+        <p15:guide id="1" orient="horz" pos="2160">
+          <p15:clr>
+            <a:srgbClr val="A4A3A4"/>
+          </p15:clr>
+        </p15:guide>
+        <p15:guide id="2" pos="2880">
+          <p15:clr>
+            <a:srgbClr val="A4A3A4"/>
+          </p15:clr>
+        </p15:guide>
+      </p15:sldGuideLst>
+    </p:ext>
+  </p:extLst>
 </p:presentation>
 </file>
 
@@ -166,10 +185,9 @@
           <a:lstStyle/>
           <a:p>
             <a:r>
-              <a:rPr lang="en-US" smtClean="0"/>
+              <a:rPr lang="en-US"/>
               <a:t>Click to edit Master title style</a:t>
             </a:r>
-            <a:endParaRPr lang="en-US"/>
           </a:p>
         </p:txBody>
       </p:sp>
@@ -285,10 +303,9 @@
           </a:lstStyle>
           <a:p>
             <a:r>
-              <a:rPr lang="en-US" smtClean="0"/>
+              <a:rPr lang="en-US"/>
               <a:t>Click to edit Master subtitle style</a:t>
             </a:r>
-            <a:endParaRPr lang="en-US"/>
           </a:p>
         </p:txBody>
       </p:sp>
@@ -310,7 +327,7 @@
             <a:fld id="{1D8BD707-D9CF-40AE-B4C6-C98DA3205C09}" type="datetimeFigureOut">
               <a:rPr lang="en-US" smtClean="0"/>
               <a:pPr/>
-              <a:t>8/1/2011</a:t>
+              <a:t>4/3/2026</a:t>
             </a:fld>
             <a:endParaRPr lang="en-US"/>
           </a:p>
@@ -400,10 +417,9 @@
           <a:lstStyle/>
           <a:p>
             <a:r>
-              <a:rPr lang="en-US" smtClean="0"/>
+              <a:rPr lang="en-US"/>
               <a:t>Click to edit Master title style</a:t>
             </a:r>
-            <a:endParaRPr lang="en-US"/>
           </a:p>
         </p:txBody>
       </p:sp>
@@ -424,38 +440,37 @@
           <a:p>
             <a:pPr lvl="0"/>
             <a:r>
-              <a:rPr lang="en-US" smtClean="0"/>
+              <a:rPr lang="en-US"/>
               <a:t>Click to edit Master text styles</a:t>
             </a:r>
           </a:p>
           <a:p>
             <a:pPr lvl="1"/>
             <a:r>
-              <a:rPr lang="en-US" smtClean="0"/>
+              <a:rPr lang="en-US"/>
               <a:t>Second level</a:t>
             </a:r>
           </a:p>
           <a:p>
             <a:pPr lvl="2"/>
             <a:r>
-              <a:rPr lang="en-US" smtClean="0"/>
+              <a:rPr lang="en-US"/>
               <a:t>Third level</a:t>
             </a:r>
           </a:p>
           <a:p>
             <a:pPr lvl="3"/>
             <a:r>
-              <a:rPr lang="en-US" smtClean="0"/>
+              <a:rPr lang="en-US"/>
               <a:t>Fourth level</a:t>
             </a:r>
           </a:p>
           <a:p>
             <a:pPr lvl="4"/>
             <a:r>
-              <a:rPr lang="en-US" smtClean="0"/>
+              <a:rPr lang="en-US"/>
               <a:t>Fifth level</a:t>
             </a:r>
-            <a:endParaRPr lang="en-US"/>
           </a:p>
         </p:txBody>
       </p:sp>
@@ -477,7 +492,7 @@
             <a:fld id="{1D8BD707-D9CF-40AE-B4C6-C98DA3205C09}" type="datetimeFigureOut">
               <a:rPr lang="en-US" smtClean="0"/>
               <a:pPr/>
-              <a:t>8/1/2011</a:t>
+              <a:t>4/3/2026</a:t>
             </a:fld>
             <a:endParaRPr lang="en-US"/>
           </a:p>
@@ -572,10 +587,9 @@
           <a:lstStyle/>
           <a:p>
             <a:r>
-              <a:rPr lang="en-US" smtClean="0"/>
+              <a:rPr lang="en-US"/>
               <a:t>Click to edit Master title style</a:t>
             </a:r>
-            <a:endParaRPr lang="en-US"/>
           </a:p>
         </p:txBody>
       </p:sp>
@@ -601,38 +615,37 @@
           <a:p>
             <a:pPr lvl="0"/>
             <a:r>
-              <a:rPr lang="en-US" smtClean="0"/>
+              <a:rPr lang="en-US"/>
               <a:t>Click to edit Master text styles</a:t>
             </a:r>
           </a:p>
           <a:p>
             <a:pPr lvl="1"/>
             <a:r>
-              <a:rPr lang="en-US" smtClean="0"/>
+              <a:rPr lang="en-US"/>
               <a:t>Second level</a:t>
             </a:r>
           </a:p>
           <a:p>
             <a:pPr lvl="2"/>
             <a:r>
-              <a:rPr lang="en-US" smtClean="0"/>
+              <a:rPr lang="en-US"/>
               <a:t>Third level</a:t>
             </a:r>
           </a:p>
           <a:p>
             <a:pPr lvl="3"/>
             <a:r>
-              <a:rPr lang="en-US" smtClean="0"/>
+              <a:rPr lang="en-US"/>
               <a:t>Fourth level</a:t>
             </a:r>
           </a:p>
           <a:p>
             <a:pPr lvl="4"/>
             <a:r>
-              <a:rPr lang="en-US" smtClean="0"/>
+              <a:rPr lang="en-US"/>
               <a:t>Fifth level</a:t>
             </a:r>
-            <a:endParaRPr lang="en-US"/>
           </a:p>
         </p:txBody>
       </p:sp>
@@ -654,7 +667,7 @@
             <a:fld id="{1D8BD707-D9CF-40AE-B4C6-C98DA3205C09}" type="datetimeFigureOut">
               <a:rPr lang="en-US" smtClean="0"/>
               <a:pPr/>
-              <a:t>8/1/2011</a:t>
+              <a:t>4/3/2026</a:t>
             </a:fld>
             <a:endParaRPr lang="en-US"/>
           </a:p>
@@ -744,10 +757,9 @@
           <a:lstStyle/>
           <a:p>
             <a:r>
-              <a:rPr lang="en-US" smtClean="0"/>
+              <a:rPr lang="en-US"/>
               <a:t>Click to edit Master title style</a:t>
             </a:r>
-            <a:endParaRPr lang="en-US"/>
           </a:p>
         </p:txBody>
       </p:sp>
@@ -768,38 +780,37 @@
           <a:p>
             <a:pPr lvl="0"/>
             <a:r>
-              <a:rPr lang="en-US" smtClean="0"/>
+              <a:rPr lang="en-US"/>
               <a:t>Click to edit Master text styles</a:t>
             </a:r>
           </a:p>
           <a:p>
             <a:pPr lvl="1"/>
             <a:r>
-              <a:rPr lang="en-US" smtClean="0"/>
+              <a:rPr lang="en-US"/>
               <a:t>Second level</a:t>
             </a:r>
           </a:p>
           <a:p>
             <a:pPr lvl="2"/>
             <a:r>
-              <a:rPr lang="en-US" smtClean="0"/>
+              <a:rPr lang="en-US"/>
               <a:t>Third level</a:t>
             </a:r>
           </a:p>
           <a:p>
             <a:pPr lvl="3"/>
             <a:r>
-              <a:rPr lang="en-US" smtClean="0"/>
+              <a:rPr lang="en-US"/>
               <a:t>Fourth level</a:t>
             </a:r>
           </a:p>
           <a:p>
             <a:pPr lvl="4"/>
             <a:r>
-              <a:rPr lang="en-US" smtClean="0"/>
+              <a:rPr lang="en-US"/>
               <a:t>Fifth level</a:t>
             </a:r>
-            <a:endParaRPr lang="en-US"/>
           </a:p>
         </p:txBody>
       </p:sp>
@@ -821,7 +832,7 @@
             <a:fld id="{1D8BD707-D9CF-40AE-B4C6-C98DA3205C09}" type="datetimeFigureOut">
               <a:rPr lang="en-US" smtClean="0"/>
               <a:pPr/>
-              <a:t>8/1/2011</a:t>
+              <a:t>4/3/2026</a:t>
             </a:fld>
             <a:endParaRPr lang="en-US"/>
           </a:p>
@@ -920,10 +931,9 @@
           </a:lstStyle>
           <a:p>
             <a:r>
-              <a:rPr lang="en-US" smtClean="0"/>
+              <a:rPr lang="en-US"/>
               <a:t>Click to edit Master title style</a:t>
             </a:r>
-            <a:endParaRPr lang="en-US"/>
           </a:p>
         </p:txBody>
       </p:sp>
@@ -1040,7 +1050,7 @@
           <a:p>
             <a:pPr lvl="0"/>
             <a:r>
-              <a:rPr lang="en-US" smtClean="0"/>
+              <a:rPr lang="en-US"/>
               <a:t>Click to edit Master text styles</a:t>
             </a:r>
           </a:p>
@@ -1064,7 +1074,7 @@
             <a:fld id="{1D8BD707-D9CF-40AE-B4C6-C98DA3205C09}" type="datetimeFigureOut">
               <a:rPr lang="en-US" smtClean="0"/>
               <a:pPr/>
-              <a:t>8/1/2011</a:t>
+              <a:t>4/3/2026</a:t>
             </a:fld>
             <a:endParaRPr lang="en-US"/>
           </a:p>
@@ -1154,10 +1164,9 @@
           <a:lstStyle/>
           <a:p>
             <a:r>
-              <a:rPr lang="en-US" smtClean="0"/>
+              <a:rPr lang="en-US"/>
               <a:t>Click to edit Master title style</a:t>
             </a:r>
-            <a:endParaRPr lang="en-US"/>
           </a:p>
         </p:txBody>
       </p:sp>
@@ -1211,38 +1220,37 @@
           <a:p>
             <a:pPr lvl="0"/>
             <a:r>
-              <a:rPr lang="en-US" smtClean="0"/>
+              <a:rPr lang="en-US"/>
               <a:t>Click to edit Master text styles</a:t>
             </a:r>
           </a:p>
           <a:p>
             <a:pPr lvl="1"/>
             <a:r>
-              <a:rPr lang="en-US" smtClean="0"/>
+              <a:rPr lang="en-US"/>
               <a:t>Second level</a:t>
             </a:r>
           </a:p>
           <a:p>
             <a:pPr lvl="2"/>
             <a:r>
-              <a:rPr lang="en-US" smtClean="0"/>
+              <a:rPr lang="en-US"/>
               <a:t>Third level</a:t>
             </a:r>
           </a:p>
           <a:p>
             <a:pPr lvl="3"/>
             <a:r>
-              <a:rPr lang="en-US" smtClean="0"/>
+              <a:rPr lang="en-US"/>
               <a:t>Fourth level</a:t>
             </a:r>
           </a:p>
           <a:p>
             <a:pPr lvl="4"/>
             <a:r>
-              <a:rPr lang="en-US" smtClean="0"/>
+              <a:rPr lang="en-US"/>
               <a:t>Fifth level</a:t>
             </a:r>
-            <a:endParaRPr lang="en-US"/>
           </a:p>
         </p:txBody>
       </p:sp>
@@ -1296,38 +1304,37 @@
           <a:p>
             <a:pPr lvl="0"/>
             <a:r>
-              <a:rPr lang="en-US" smtClean="0"/>
+              <a:rPr lang="en-US"/>
               <a:t>Click to edit Master text styles</a:t>
             </a:r>
           </a:p>
           <a:p>
             <a:pPr lvl="1"/>
             <a:r>
-              <a:rPr lang="en-US" smtClean="0"/>
+              <a:rPr lang="en-US"/>
               <a:t>Second level</a:t>
             </a:r>
           </a:p>
           <a:p>
             <a:pPr lvl="2"/>
             <a:r>
-              <a:rPr lang="en-US" smtClean="0"/>
+              <a:rPr lang="en-US"/>
               <a:t>Third level</a:t>
             </a:r>
           </a:p>
           <a:p>
             <a:pPr lvl="3"/>
             <a:r>
-              <a:rPr lang="en-US" smtClean="0"/>
+              <a:rPr lang="en-US"/>
               <a:t>Fourth level</a:t>
             </a:r>
           </a:p>
           <a:p>
             <a:pPr lvl="4"/>
             <a:r>
-              <a:rPr lang="en-US" smtClean="0"/>
+              <a:rPr lang="en-US"/>
               <a:t>Fifth level</a:t>
             </a:r>
-            <a:endParaRPr lang="en-US"/>
           </a:p>
         </p:txBody>
       </p:sp>
@@ -1349,7 +1356,7 @@
             <a:fld id="{1D8BD707-D9CF-40AE-B4C6-C98DA3205C09}" type="datetimeFigureOut">
               <a:rPr lang="en-US" smtClean="0"/>
               <a:pPr/>
-              <a:t>8/1/2011</a:t>
+              <a:t>4/3/2026</a:t>
             </a:fld>
             <a:endParaRPr lang="en-US"/>
           </a:p>
@@ -1443,10 +1450,9 @@
           </a:lstStyle>
           <a:p>
             <a:r>
-              <a:rPr lang="en-US" smtClean="0"/>
+              <a:rPr lang="en-US"/>
               <a:t>Click to edit Master title style</a:t>
             </a:r>
-            <a:endParaRPr lang="en-US"/>
           </a:p>
         </p:txBody>
       </p:sp>
@@ -1509,7 +1515,7 @@
           <a:p>
             <a:pPr lvl="0"/>
             <a:r>
-              <a:rPr lang="en-US" smtClean="0"/>
+              <a:rPr lang="en-US"/>
               <a:t>Click to edit Master text styles</a:t>
             </a:r>
           </a:p>
@@ -1565,38 +1571,37 @@
           <a:p>
             <a:pPr lvl="0"/>
             <a:r>
-              <a:rPr lang="en-US" smtClean="0"/>
+              <a:rPr lang="en-US"/>
               <a:t>Click to edit Master text styles</a:t>
             </a:r>
           </a:p>
           <a:p>
             <a:pPr lvl="1"/>
             <a:r>
-              <a:rPr lang="en-US" smtClean="0"/>
+              <a:rPr lang="en-US"/>
               <a:t>Second level</a:t>
             </a:r>
           </a:p>
           <a:p>
             <a:pPr lvl="2"/>
             <a:r>
-              <a:rPr lang="en-US" smtClean="0"/>
+              <a:rPr lang="en-US"/>
               <a:t>Third level</a:t>
             </a:r>
           </a:p>
           <a:p>
             <a:pPr lvl="3"/>
             <a:r>
-              <a:rPr lang="en-US" smtClean="0"/>
+              <a:rPr lang="en-US"/>
               <a:t>Fourth level</a:t>
             </a:r>
           </a:p>
           <a:p>
             <a:pPr lvl="4"/>
             <a:r>
-              <a:rPr lang="en-US" smtClean="0"/>
+              <a:rPr lang="en-US"/>
               <a:t>Fifth level</a:t>
             </a:r>
-            <a:endParaRPr lang="en-US"/>
           </a:p>
         </p:txBody>
       </p:sp>
@@ -1659,7 +1664,7 @@
           <a:p>
             <a:pPr lvl="0"/>
             <a:r>
-              <a:rPr lang="en-US" smtClean="0"/>
+              <a:rPr lang="en-US"/>
               <a:t>Click to edit Master text styles</a:t>
             </a:r>
           </a:p>
@@ -1715,38 +1720,37 @@
           <a:p>
             <a:pPr lvl="0"/>
             <a:r>
-              <a:rPr lang="en-US" smtClean="0"/>
+              <a:rPr lang="en-US"/>
               <a:t>Click to edit Master text styles</a:t>
             </a:r>
           </a:p>
           <a:p>
             <a:pPr lvl="1"/>
             <a:r>
-              <a:rPr lang="en-US" smtClean="0"/>
+              <a:rPr lang="en-US"/>
               <a:t>Second level</a:t>
             </a:r>
           </a:p>
           <a:p>
             <a:pPr lvl="2"/>
             <a:r>
-              <a:rPr lang="en-US" smtClean="0"/>
+              <a:rPr lang="en-US"/>
               <a:t>Third level</a:t>
             </a:r>
           </a:p>
           <a:p>
             <a:pPr lvl="3"/>
             <a:r>
-              <a:rPr lang="en-US" smtClean="0"/>
+              <a:rPr lang="en-US"/>
               <a:t>Fourth level</a:t>
             </a:r>
           </a:p>
           <a:p>
             <a:pPr lvl="4"/>
             <a:r>
-              <a:rPr lang="en-US" smtClean="0"/>
+              <a:rPr lang="en-US"/>
               <a:t>Fifth level</a:t>
             </a:r>
-            <a:endParaRPr lang="en-US"/>
           </a:p>
         </p:txBody>
       </p:sp>
@@ -1768,7 +1772,7 @@
             <a:fld id="{1D8BD707-D9CF-40AE-B4C6-C98DA3205C09}" type="datetimeFigureOut">
               <a:rPr lang="en-US" smtClean="0"/>
               <a:pPr/>
-              <a:t>8/1/2011</a:t>
+              <a:t>4/3/2026</a:t>
             </a:fld>
             <a:endParaRPr lang="en-US"/>
           </a:p>
@@ -1858,10 +1862,9 @@
           <a:lstStyle/>
           <a:p>
             <a:r>
-              <a:rPr lang="en-US" smtClean="0"/>
+              <a:rPr lang="en-US"/>
               <a:t>Click to edit Master title style</a:t>
             </a:r>
-            <a:endParaRPr lang="en-US"/>
           </a:p>
         </p:txBody>
       </p:sp>
@@ -1883,7 +1886,7 @@
             <a:fld id="{1D8BD707-D9CF-40AE-B4C6-C98DA3205C09}" type="datetimeFigureOut">
               <a:rPr lang="en-US" smtClean="0"/>
               <a:pPr/>
-              <a:t>8/1/2011</a:t>
+              <a:t>4/3/2026</a:t>
             </a:fld>
             <a:endParaRPr lang="en-US"/>
           </a:p>
@@ -1975,7 +1978,7 @@
             <a:fld id="{1D8BD707-D9CF-40AE-B4C6-C98DA3205C09}" type="datetimeFigureOut">
               <a:rPr lang="en-US" smtClean="0"/>
               <a:pPr/>
-              <a:t>8/1/2011</a:t>
+              <a:t>4/3/2026</a:t>
             </a:fld>
             <a:endParaRPr lang="en-US"/>
           </a:p>
@@ -2074,10 +2077,9 @@
           </a:lstStyle>
           <a:p>
             <a:r>
-              <a:rPr lang="en-US" smtClean="0"/>
+              <a:rPr lang="en-US"/>
               <a:t>Click to edit Master title style</a:t>
             </a:r>
-            <a:endParaRPr lang="en-US"/>
           </a:p>
         </p:txBody>
       </p:sp>
@@ -2131,38 +2133,37 @@
           <a:p>
             <a:pPr lvl="0"/>
             <a:r>
-              <a:rPr lang="en-US" smtClean="0"/>
+              <a:rPr lang="en-US"/>
               <a:t>Click to edit Master text styles</a:t>
             </a:r>
           </a:p>
           <a:p>
             <a:pPr lvl="1"/>
             <a:r>
-              <a:rPr lang="en-US" smtClean="0"/>
+              <a:rPr lang="en-US"/>
               <a:t>Second level</a:t>
             </a:r>
           </a:p>
           <a:p>
             <a:pPr lvl="2"/>
             <a:r>
-              <a:rPr lang="en-US" smtClean="0"/>
+              <a:rPr lang="en-US"/>
               <a:t>Third level</a:t>
             </a:r>
           </a:p>
           <a:p>
             <a:pPr lvl="3"/>
             <a:r>
-              <a:rPr lang="en-US" smtClean="0"/>
+              <a:rPr lang="en-US"/>
               <a:t>Fourth level</a:t>
             </a:r>
           </a:p>
           <a:p>
             <a:pPr lvl="4"/>
             <a:r>
-              <a:rPr lang="en-US" smtClean="0"/>
+              <a:rPr lang="en-US"/>
               <a:t>Fifth level</a:t>
             </a:r>
-            <a:endParaRPr lang="en-US"/>
           </a:p>
         </p:txBody>
       </p:sp>
@@ -2225,7 +2226,7 @@
           <a:p>
             <a:pPr lvl="0"/>
             <a:r>
-              <a:rPr lang="en-US" smtClean="0"/>
+              <a:rPr lang="en-US"/>
               <a:t>Click to edit Master text styles</a:t>
             </a:r>
           </a:p>
@@ -2249,7 +2250,7 @@
             <a:fld id="{1D8BD707-D9CF-40AE-B4C6-C98DA3205C09}" type="datetimeFigureOut">
               <a:rPr lang="en-US" smtClean="0"/>
               <a:pPr/>
-              <a:t>8/1/2011</a:t>
+              <a:t>4/3/2026</a:t>
             </a:fld>
             <a:endParaRPr lang="en-US"/>
           </a:p>
@@ -2348,10 +2349,9 @@
           </a:lstStyle>
           <a:p>
             <a:r>
-              <a:rPr lang="en-US" smtClean="0"/>
+              <a:rPr lang="en-US"/>
               <a:t>Click to edit Master title style</a:t>
             </a:r>
-            <a:endParaRPr lang="en-US"/>
           </a:p>
         </p:txBody>
       </p:sp>
@@ -2475,7 +2475,7 @@
           <a:p>
             <a:pPr lvl="0"/>
             <a:r>
-              <a:rPr lang="en-US" smtClean="0"/>
+              <a:rPr lang="en-US"/>
               <a:t>Click to edit Master text styles</a:t>
             </a:r>
           </a:p>
@@ -2499,7 +2499,7 @@
             <a:fld id="{1D8BD707-D9CF-40AE-B4C6-C98DA3205C09}" type="datetimeFigureOut">
               <a:rPr lang="en-US" smtClean="0"/>
               <a:pPr/>
-              <a:t>8/1/2011</a:t>
+              <a:t>4/3/2026</a:t>
             </a:fld>
             <a:endParaRPr lang="en-US"/>
           </a:p>
@@ -2604,10 +2604,9 @@
           <a:lstStyle/>
           <a:p>
             <a:r>
-              <a:rPr lang="en-US" smtClean="0"/>
+              <a:rPr lang="en-US"/>
               <a:t>Click to edit Master title style</a:t>
             </a:r>
-            <a:endParaRPr lang="en-US"/>
           </a:p>
         </p:txBody>
       </p:sp>
@@ -2638,38 +2637,37 @@
           <a:p>
             <a:pPr lvl="0"/>
             <a:r>
-              <a:rPr lang="en-US" smtClean="0"/>
+              <a:rPr lang="en-US"/>
               <a:t>Click to edit Master text styles</a:t>
             </a:r>
           </a:p>
           <a:p>
             <a:pPr lvl="1"/>
             <a:r>
-              <a:rPr lang="en-US" smtClean="0"/>
+              <a:rPr lang="en-US"/>
               <a:t>Second level</a:t>
             </a:r>
           </a:p>
           <a:p>
             <a:pPr lvl="2"/>
             <a:r>
-              <a:rPr lang="en-US" smtClean="0"/>
+              <a:rPr lang="en-US"/>
               <a:t>Third level</a:t>
             </a:r>
           </a:p>
           <a:p>
             <a:pPr lvl="3"/>
             <a:r>
-              <a:rPr lang="en-US" smtClean="0"/>
+              <a:rPr lang="en-US"/>
               <a:t>Fourth level</a:t>
             </a:r>
           </a:p>
           <a:p>
             <a:pPr lvl="4"/>
             <a:r>
-              <a:rPr lang="en-US" smtClean="0"/>
+              <a:rPr lang="en-US"/>
               <a:t>Fifth level</a:t>
             </a:r>
-            <a:endParaRPr lang="en-US"/>
           </a:p>
         </p:txBody>
       </p:sp>
@@ -2709,7 +2707,7 @@
             <a:fld id="{1D8BD707-D9CF-40AE-B4C6-C98DA3205C09}" type="datetimeFigureOut">
               <a:rPr lang="en-US" smtClean="0"/>
               <a:pPr/>
-              <a:t>8/1/2011</a:t>
+              <a:t>4/3/2026</a:t>
             </a:fld>
             <a:endParaRPr lang="en-US"/>
           </a:p>
@@ -3064,7 +3062,7 @@
 </file>
 
 <file path=ppt/slides/slide1.xml><?xml version="1.0" encoding="utf-8"?>
-<p:sld xmlns:p="http://schemas.openxmlformats.org/presentationml/2006/main" xmlns:a="http://schemas.openxmlformats.org/drawingml/2006/main" xmlns:r="http://schemas.openxmlformats.org/officeDocument/2006/relationships">
+<p:sld xmlns:a="http://schemas.openxmlformats.org/drawingml/2006/main" xmlns:r="http://schemas.openxmlformats.org/officeDocument/2006/relationships" xmlns:p="http://schemas.openxmlformats.org/presentationml/2006/main">
   <p:cSld>
     <p:spTree>
       <p:nvGrpSpPr>
@@ -3080,106 +3078,14 @@
           <a:chExt cx="0" cy="0"/>
         </a:xfrm>
       </p:grpSpPr>
-      <p:sp>
-        <p:nvSpPr>
-          <p:cNvPr name="Freeform 2" id="2"/>
-          <p:cNvSpPr/>
-          <p:nvPr/>
-        </p:nvSpPr>
-        <p:spPr>
-          <a:xfrm flipH="false" flipV="false" rot="0">
-            <a:off x="0" y="0"/>
-            <a:ext cx="18288000" cy="10287000"/>
-          </a:xfrm>
-          <a:custGeom>
-            <a:avLst/>
-            <a:gdLst/>
-            <a:ahLst/>
-            <a:cxnLst/>
-            <a:rect r="r" b="b" t="t" l="l"/>
-            <a:pathLst>
-              <a:path h="10287000" w="18288000">
-                <a:moveTo>
-                  <a:pt x="0" y="0"/>
-                </a:moveTo>
-                <a:lnTo>
-                  <a:pt x="18288000" y="0"/>
-                </a:lnTo>
-                <a:lnTo>
-                  <a:pt x="18288000" y="10287000"/>
-                </a:lnTo>
-                <a:lnTo>
-                  <a:pt x="0" y="10287000"/>
-                </a:lnTo>
-                <a:lnTo>
-                  <a:pt x="0" y="0"/>
-                </a:lnTo>
-                <a:close/>
-              </a:path>
-            </a:pathLst>
-          </a:custGeom>
-          <a:blipFill>
-            <a:blip r:embed="rId2"/>
-            <a:stretch>
-              <a:fillRect l="0" t="0" r="0" b="0"/>
-            </a:stretch>
-          </a:blipFill>
-        </p:spPr>
-      </p:sp>
-      <p:sp>
-        <p:nvSpPr>
-          <p:cNvPr name="Freeform 3" id="3"/>
-          <p:cNvSpPr/>
-          <p:nvPr/>
-        </p:nvSpPr>
-        <p:spPr>
-          <a:xfrm flipH="false" flipV="false" rot="0">
-            <a:off x="3732577" y="3883834"/>
-            <a:ext cx="10822847" cy="2519332"/>
-          </a:xfrm>
-          <a:custGeom>
-            <a:avLst/>
-            <a:gdLst/>
-            <a:ahLst/>
-            <a:cxnLst/>
-            <a:rect r="r" b="b" t="t" l="l"/>
-            <a:pathLst>
-              <a:path h="2519332" w="10822847">
-                <a:moveTo>
-                  <a:pt x="0" y="0"/>
-                </a:moveTo>
-                <a:lnTo>
-                  <a:pt x="10822846" y="0"/>
-                </a:lnTo>
-                <a:lnTo>
-                  <a:pt x="10822846" y="2519332"/>
-                </a:lnTo>
-                <a:lnTo>
-                  <a:pt x="0" y="2519332"/>
-                </a:lnTo>
-                <a:lnTo>
-                  <a:pt x="0" y="0"/>
-                </a:lnTo>
-                <a:close/>
-              </a:path>
-            </a:pathLst>
-          </a:custGeom>
-          <a:blipFill>
-            <a:blip r:embed="rId3"/>
-            <a:stretch>
-              <a:fillRect l="0" t="0" r="0" b="0"/>
-            </a:stretch>
-          </a:blipFill>
-        </p:spPr>
-      </p:sp>
       <p:grpSp>
         <p:nvGrpSpPr>
-          <p:cNvPr name="Group 4" id="4"/>
+          <p:cNvPr id="4" name="Group 4"/>
           <p:cNvGrpSpPr/>
           <p:nvPr/>
         </p:nvGrpSpPr>
         <p:grpSpPr>
-          <a:xfrm rot="0">
+          <a:xfrm>
             <a:off x="3403189" y="463637"/>
             <a:ext cx="11481622" cy="1130126"/>
             <a:chOff x="0" y="0"/>
@@ -3188,12 +3094,12 @@
         </p:grpSpPr>
         <p:sp>
           <p:nvSpPr>
-            <p:cNvPr name="Freeform 5" id="5"/>
+            <p:cNvPr id="5" name="Freeform 5"/>
             <p:cNvSpPr/>
             <p:nvPr/>
           </p:nvSpPr>
           <p:spPr>
-            <a:xfrm flipH="false" flipV="false" rot="0">
+            <a:xfrm>
               <a:off x="0" y="0"/>
               <a:ext cx="3023966" cy="297646"/>
             </a:xfrm>
@@ -3202,9 +3108,9 @@
               <a:gdLst/>
               <a:ahLst/>
               <a:cxnLst/>
-              <a:rect r="r" b="b" t="t" l="l"/>
+              <a:rect l="l" t="t" r="r" b="b"/>
               <a:pathLst>
-                <a:path h="297646" w="3023966">
+                <a:path w="3023966" h="297646">
                   <a:moveTo>
                     <a:pt x="48549" y="0"/>
                   </a:moveTo>
@@ -3256,8 +3162,8 @@
         </p:sp>
         <p:sp>
           <p:nvSpPr>
-            <p:cNvPr name="TextBox 6" id="6"/>
-            <p:cNvSpPr txBox="true"/>
+            <p:cNvPr id="6" name="TextBox 6"/>
+            <p:cNvSpPr txBox="1"/>
             <p:nvPr/>
           </p:nvSpPr>
           <p:spPr>
@@ -3270,7 +3176,7 @@
             </a:prstGeom>
           </p:spPr>
           <p:txBody>
-            <a:bodyPr anchor="ctr" rtlCol="false" tIns="50800" lIns="50800" bIns="50800" rIns="50800"/>
+            <a:bodyPr lIns="50800" tIns="50800" rIns="50800" bIns="50800" rtlCol="0" anchor="ctr"/>
             <a:lstStyle/>
             <a:p>
               <a:pPr algn="ctr">
@@ -3278,56 +3184,47 @@
                   <a:spcPts val="2800"/>
                 </a:lnSpc>
               </a:pPr>
+              <a:endParaRPr/>
             </a:p>
           </p:txBody>
         </p:sp>
       </p:grpSp>
-      <p:sp>
-        <p:nvSpPr>
-          <p:cNvPr name="Freeform 7" id="7"/>
-          <p:cNvSpPr/>
+      <p:pic>
+        <p:nvPicPr>
+          <p:cNvPr id="9" name="Picture 8">
+            <a:extLst>
+              <a:ext uri="{FF2B5EF4-FFF2-40B4-BE49-F238E27FC236}">
+                <a16:creationId xmlns:a16="http://schemas.microsoft.com/office/drawing/2014/main" id="{63118F01-29A2-3214-E982-D42B0C60CD01}"/>
+              </a:ext>
+            </a:extLst>
+          </p:cNvPr>
+          <p:cNvPicPr>
+            <a:picLocks noChangeAspect="1"/>
+          </p:cNvPicPr>
           <p:nvPr/>
-        </p:nvSpPr>
+        </p:nvPicPr>
+        <p:blipFill>
+          <a:blip r:embed="rId2">
+            <a:extLst>
+              <a:ext uri="{28A0092B-C50C-407E-A947-70E740481C1C}">
+                <a14:useLocalDpi xmlns:a14="http://schemas.microsoft.com/office/drawing/2010/main" val="0"/>
+              </a:ext>
+            </a:extLst>
+          </a:blip>
+          <a:stretch>
+            <a:fillRect/>
+          </a:stretch>
+        </p:blipFill>
         <p:spPr>
-          <a:xfrm flipH="false" flipV="false" rot="0">
-            <a:off x="3625975" y="644652"/>
-            <a:ext cx="10972800" cy="768096"/>
-          </a:xfrm>
-          <a:custGeom>
+          <a:xfrm>
+            <a:off x="0" y="0"/>
+            <a:ext cx="18288000" cy="10287000"/>
+          </a:xfrm>
+          <a:prstGeom prst="rect">
             <a:avLst/>
-            <a:gdLst/>
-            <a:ahLst/>
-            <a:cxnLst/>
-            <a:rect r="r" b="b" t="t" l="l"/>
-            <a:pathLst>
-              <a:path h="768096" w="10972800">
-                <a:moveTo>
-                  <a:pt x="0" y="0"/>
-                </a:moveTo>
-                <a:lnTo>
-                  <a:pt x="10972800" y="0"/>
-                </a:lnTo>
-                <a:lnTo>
-                  <a:pt x="10972800" y="768096"/>
-                </a:lnTo>
-                <a:lnTo>
-                  <a:pt x="0" y="768096"/>
-                </a:lnTo>
-                <a:lnTo>
-                  <a:pt x="0" y="0"/>
-                </a:lnTo>
-                <a:close/>
-              </a:path>
-            </a:pathLst>
-          </a:custGeom>
-          <a:blipFill>
-            <a:blip r:embed="rId4"/>
-            <a:stretch>
-              <a:fillRect l="0" t="0" r="0" b="0"/>
-            </a:stretch>
-          </a:blipFill>
+          </a:prstGeom>
         </p:spPr>
-      </p:sp>
+      </p:pic>
     </p:spTree>
   </p:cSld>
   <p:clrMapOvr>
@@ -3337,7 +3234,7 @@
 </file>
 
 <file path=ppt/slides/slide2.xml><?xml version="1.0" encoding="utf-8"?>
-<p:sld xmlns:p="http://schemas.openxmlformats.org/presentationml/2006/main" xmlns:a="http://schemas.openxmlformats.org/drawingml/2006/main" xmlns:r="http://schemas.openxmlformats.org/officeDocument/2006/relationships">
+<p:sld xmlns:a="http://schemas.openxmlformats.org/drawingml/2006/main" xmlns:r="http://schemas.openxmlformats.org/officeDocument/2006/relationships" xmlns:p="http://schemas.openxmlformats.org/presentationml/2006/main">
   <p:cSld>
     <p:spTree>
       <p:nvGrpSpPr>
@@ -3355,12 +3252,12 @@
       </p:grpSpPr>
       <p:sp>
         <p:nvSpPr>
-          <p:cNvPr name="Freeform 2" id="2"/>
+          <p:cNvPr id="2" name="Freeform 2"/>
           <p:cNvSpPr/>
           <p:nvPr/>
         </p:nvSpPr>
         <p:spPr>
-          <a:xfrm flipH="false" flipV="false" rot="0">
+          <a:xfrm>
             <a:off x="0" y="-30260"/>
             <a:ext cx="18288000" cy="10317260"/>
           </a:xfrm>
@@ -3369,9 +3266,9 @@
             <a:gdLst/>
             <a:ahLst/>
             <a:cxnLst/>
-            <a:rect r="r" b="b" t="t" l="l"/>
+            <a:rect l="l" t="t" r="r" b="b"/>
             <a:pathLst>
-              <a:path h="10317260" w="18288000">
+              <a:path w="18288000" h="10317260">
                 <a:moveTo>
                   <a:pt x="0" y="0"/>
                 </a:moveTo>
@@ -3394,19 +3291,19 @@
           <a:blipFill>
             <a:blip r:embed="rId2"/>
             <a:stretch>
-              <a:fillRect l="0" t="-12704" r="0" b="-12704"/>
+              <a:fillRect t="-12704" b="-12704"/>
             </a:stretch>
           </a:blipFill>
         </p:spPr>
       </p:sp>
       <p:grpSp>
         <p:nvGrpSpPr>
-          <p:cNvPr name="Group 3" id="3"/>
+          <p:cNvPr id="3" name="Group 3"/>
           <p:cNvGrpSpPr/>
           <p:nvPr/>
         </p:nvGrpSpPr>
         <p:grpSpPr>
-          <a:xfrm rot="0">
+          <a:xfrm>
             <a:off x="471693" y="4239699"/>
             <a:ext cx="17344614" cy="5778223"/>
             <a:chOff x="0" y="0"/>
@@ -3415,12 +3312,12 @@
         </p:grpSpPr>
         <p:sp>
           <p:nvSpPr>
-            <p:cNvPr name="Freeform 4" id="4"/>
+            <p:cNvPr id="4" name="Freeform 4"/>
             <p:cNvSpPr/>
             <p:nvPr/>
           </p:nvSpPr>
           <p:spPr>
-            <a:xfrm flipH="false" flipV="false" rot="0">
+            <a:xfrm>
               <a:off x="0" y="0"/>
               <a:ext cx="4568129" cy="1521836"/>
             </a:xfrm>
@@ -3429,9 +3326,9 @@
               <a:gdLst/>
               <a:ahLst/>
               <a:cxnLst/>
-              <a:rect r="r" b="b" t="t" l="l"/>
+              <a:rect l="l" t="t" r="r" b="b"/>
               <a:pathLst>
-                <a:path h="1521836" w="4568129">
+                <a:path w="4568129" h="1521836">
                   <a:moveTo>
                     <a:pt x="22764" y="0"/>
                   </a:moveTo>
@@ -3505,8 +3402,8 @@
         </p:sp>
         <p:sp>
           <p:nvSpPr>
-            <p:cNvPr name="TextBox 5" id="5"/>
-            <p:cNvSpPr txBox="true"/>
+            <p:cNvPr id="5" name="TextBox 5"/>
+            <p:cNvSpPr txBox="1"/>
             <p:nvPr/>
           </p:nvSpPr>
           <p:spPr>
@@ -3519,7 +3416,7 @@
             </a:prstGeom>
           </p:spPr>
           <p:txBody>
-            <a:bodyPr anchor="ctr" rtlCol="false" tIns="50800" lIns="50800" bIns="50800" rIns="50800"/>
+            <a:bodyPr lIns="50800" tIns="50800" rIns="50800" bIns="50800" rtlCol="0" anchor="ctr"/>
             <a:lstStyle/>
             <a:p>
               <a:pPr algn="ctr">
@@ -3527,18 +3424,19 @@
                   <a:spcPts val="2800"/>
                 </a:lnSpc>
               </a:pPr>
+              <a:endParaRPr/>
             </a:p>
           </p:txBody>
         </p:sp>
       </p:grpSp>
       <p:grpSp>
         <p:nvGrpSpPr>
-          <p:cNvPr name="Group 6" id="6"/>
+          <p:cNvPr id="6" name="Group 6"/>
           <p:cNvGrpSpPr/>
           <p:nvPr/>
         </p:nvGrpSpPr>
         <p:grpSpPr>
-          <a:xfrm rot="0">
+          <a:xfrm>
             <a:off x="9508020" y="1897749"/>
             <a:ext cx="6893609" cy="2025852"/>
             <a:chOff x="0" y="0"/>
@@ -3547,12 +3445,12 @@
         </p:grpSpPr>
         <p:sp>
           <p:nvSpPr>
-            <p:cNvPr name="Freeform 7" id="7"/>
+            <p:cNvPr id="7" name="Freeform 7"/>
             <p:cNvSpPr/>
             <p:nvPr/>
           </p:nvSpPr>
           <p:spPr>
-            <a:xfrm flipH="false" flipV="false" rot="0">
+            <a:xfrm>
               <a:off x="0" y="0"/>
               <a:ext cx="1815601" cy="533558"/>
             </a:xfrm>
@@ -3561,9 +3459,9 @@
               <a:gdLst/>
               <a:ahLst/>
               <a:cxnLst/>
-              <a:rect r="r" b="b" t="t" l="l"/>
+              <a:rect l="l" t="t" r="r" b="b"/>
               <a:pathLst>
-                <a:path h="533558" w="1815601">
+                <a:path w="1815601" h="533558">
                   <a:moveTo>
                     <a:pt x="57276" y="0"/>
                   </a:moveTo>
@@ -3632,8 +3530,8 @@
         </p:sp>
         <p:sp>
           <p:nvSpPr>
-            <p:cNvPr name="TextBox 8" id="8"/>
-            <p:cNvSpPr txBox="true"/>
+            <p:cNvPr id="8" name="TextBox 8"/>
+            <p:cNvSpPr txBox="1"/>
             <p:nvPr/>
           </p:nvSpPr>
           <p:spPr>
@@ -3646,7 +3544,7 @@
             </a:prstGeom>
           </p:spPr>
           <p:txBody>
-            <a:bodyPr anchor="ctr" rtlCol="false" tIns="50800" lIns="50800" bIns="50800" rIns="50800"/>
+            <a:bodyPr lIns="50800" tIns="50800" rIns="50800" bIns="50800" rtlCol="0" anchor="ctr"/>
             <a:lstStyle/>
             <a:p>
               <a:pPr algn="ctr">
@@ -3654,18 +3552,19 @@
                   <a:spcPts val="2800"/>
                 </a:lnSpc>
               </a:pPr>
+              <a:endParaRPr/>
             </a:p>
           </p:txBody>
         </p:sp>
       </p:grpSp>
       <p:grpSp>
         <p:nvGrpSpPr>
-          <p:cNvPr name="Group 9" id="9"/>
+          <p:cNvPr id="9" name="Group 9"/>
           <p:cNvGrpSpPr/>
           <p:nvPr/>
         </p:nvGrpSpPr>
         <p:grpSpPr>
-          <a:xfrm rot="0">
+          <a:xfrm>
             <a:off x="1886371" y="1897749"/>
             <a:ext cx="6893609" cy="2025852"/>
             <a:chOff x="0" y="0"/>
@@ -3674,12 +3573,12 @@
         </p:grpSpPr>
         <p:sp>
           <p:nvSpPr>
-            <p:cNvPr name="Freeform 10" id="10"/>
+            <p:cNvPr id="10" name="Freeform 10"/>
             <p:cNvSpPr/>
             <p:nvPr/>
           </p:nvSpPr>
           <p:spPr>
-            <a:xfrm flipH="false" flipV="false" rot="0">
+            <a:xfrm>
               <a:off x="0" y="0"/>
               <a:ext cx="1815601" cy="533558"/>
             </a:xfrm>
@@ -3688,9 +3587,9 @@
               <a:gdLst/>
               <a:ahLst/>
               <a:cxnLst/>
-              <a:rect r="r" b="b" t="t" l="l"/>
+              <a:rect l="l" t="t" r="r" b="b"/>
               <a:pathLst>
-                <a:path h="533558" w="1815601">
+                <a:path w="1815601" h="533558">
                   <a:moveTo>
                     <a:pt x="57276" y="0"/>
                   </a:moveTo>
@@ -3759,8 +3658,8 @@
         </p:sp>
         <p:sp>
           <p:nvSpPr>
-            <p:cNvPr name="TextBox 11" id="11"/>
-            <p:cNvSpPr txBox="true"/>
+            <p:cNvPr id="11" name="TextBox 11"/>
+            <p:cNvSpPr txBox="1"/>
             <p:nvPr/>
           </p:nvSpPr>
           <p:spPr>
@@ -3773,7 +3672,7 @@
             </a:prstGeom>
           </p:spPr>
           <p:txBody>
-            <a:bodyPr anchor="ctr" rtlCol="false" tIns="50800" lIns="50800" bIns="50800" rIns="50800"/>
+            <a:bodyPr lIns="50800" tIns="50800" rIns="50800" bIns="50800" rtlCol="0" anchor="ctr"/>
             <a:lstStyle/>
             <a:p>
               <a:pPr algn="ctr">
@@ -3781,18 +3680,19 @@
                   <a:spcPts val="2800"/>
                 </a:lnSpc>
               </a:pPr>
+              <a:endParaRPr/>
             </a:p>
           </p:txBody>
         </p:sp>
       </p:grpSp>
       <p:sp>
         <p:nvSpPr>
-          <p:cNvPr name="Freeform 12" id="12"/>
+          <p:cNvPr id="12" name="Freeform 12"/>
           <p:cNvSpPr/>
           <p:nvPr/>
         </p:nvSpPr>
         <p:spPr>
-          <a:xfrm flipH="false" flipV="false" rot="0">
+          <a:xfrm>
             <a:off x="14279498" y="573541"/>
             <a:ext cx="3536809" cy="823295"/>
           </a:xfrm>
@@ -3801,9 +3701,9 @@
             <a:gdLst/>
             <a:ahLst/>
             <a:cxnLst/>
-            <a:rect r="r" b="b" t="t" l="l"/>
+            <a:rect l="l" t="t" r="r" b="b"/>
             <a:pathLst>
-              <a:path h="823295" w="3536809">
+              <a:path w="3536809" h="823295">
                 <a:moveTo>
                   <a:pt x="0" y="0"/>
                 </a:moveTo>
@@ -3826,19 +3726,19 @@
           <a:blipFill>
             <a:blip r:embed="rId3"/>
             <a:stretch>
-              <a:fillRect l="0" t="0" r="0" b="0"/>
+              <a:fillRect/>
             </a:stretch>
           </a:blipFill>
         </p:spPr>
       </p:sp>
       <p:sp>
         <p:nvSpPr>
-          <p:cNvPr name="TextBox 13" id="13"/>
-          <p:cNvSpPr txBox="true"/>
+          <p:cNvPr id="13" name="TextBox 13"/>
+          <p:cNvSpPr txBox="1"/>
           <p:nvPr/>
         </p:nvSpPr>
         <p:spPr>
-          <a:xfrm rot="0">
+          <a:xfrm>
             <a:off x="3736890" y="2610637"/>
             <a:ext cx="3192570" cy="600075"/>
           </a:xfrm>
@@ -3847,7 +3747,7 @@
           </a:prstGeom>
         </p:spPr>
         <p:txBody>
-          <a:bodyPr anchor="t" rtlCol="false" tIns="0" lIns="0" bIns="0" rIns="0">
+          <a:bodyPr lIns="0" tIns="0" rIns="0" bIns="0" rtlCol="0" anchor="t">
             <a:spAutoFit/>
           </a:bodyPr>
           <a:lstStyle/>
@@ -3858,7 +3758,7 @@
               </a:lnSpc>
             </a:pPr>
             <a:r>
-              <a:rPr lang="en-US" b="true" sz="3999">
+              <a:rPr lang="en-US" sz="3999" b="1">
                 <a:solidFill>
                   <a:srgbClr val="03B8E1"/>
                 </a:solidFill>
@@ -3874,12 +3774,12 @@
       </p:sp>
       <p:sp>
         <p:nvSpPr>
-          <p:cNvPr name="TextBox 14" id="14"/>
-          <p:cNvSpPr txBox="true"/>
+          <p:cNvPr id="14" name="TextBox 14"/>
+          <p:cNvSpPr txBox="1"/>
           <p:nvPr/>
         </p:nvSpPr>
         <p:spPr>
-          <a:xfrm rot="0">
+          <a:xfrm>
             <a:off x="10942835" y="2610637"/>
             <a:ext cx="4334664" cy="600075"/>
           </a:xfrm>
@@ -3888,7 +3788,7 @@
           </a:prstGeom>
         </p:spPr>
         <p:txBody>
-          <a:bodyPr anchor="t" rtlCol="false" tIns="0" lIns="0" bIns="0" rIns="0">
+          <a:bodyPr lIns="0" tIns="0" rIns="0" bIns="0" rtlCol="0" anchor="t">
             <a:spAutoFit/>
           </a:bodyPr>
           <a:lstStyle/>
@@ -3899,7 +3799,7 @@
               </a:lnSpc>
             </a:pPr>
             <a:r>
-              <a:rPr lang="en-US" sz="3999" b="true">
+              <a:rPr lang="en-US" sz="3999" b="1">
                 <a:solidFill>
                   <a:srgbClr val="03B8E1"/>
                 </a:solidFill>
@@ -3915,12 +3815,12 @@
       </p:sp>
       <p:sp>
         <p:nvSpPr>
-          <p:cNvPr name="TextBox 15" id="15"/>
-          <p:cNvSpPr txBox="true"/>
+          <p:cNvPr id="15" name="TextBox 15"/>
+          <p:cNvSpPr txBox="1"/>
           <p:nvPr/>
         </p:nvSpPr>
         <p:spPr>
-          <a:xfrm rot="0">
+          <a:xfrm>
             <a:off x="6939558" y="568161"/>
             <a:ext cx="5027349" cy="828675"/>
           </a:xfrm>
@@ -3929,7 +3829,7 @@
           </a:prstGeom>
         </p:spPr>
         <p:txBody>
-          <a:bodyPr anchor="t" rtlCol="false" tIns="0" lIns="0" bIns="0" rIns="0">
+          <a:bodyPr lIns="0" tIns="0" rIns="0" bIns="0" rtlCol="0" anchor="t">
             <a:spAutoFit/>
           </a:bodyPr>
           <a:lstStyle/>
@@ -3940,7 +3840,7 @@
               </a:lnSpc>
             </a:pPr>
             <a:r>
-              <a:rPr lang="en-US" b="true" sz="5499">
+              <a:rPr lang="en-US" sz="5499" b="1">
                 <a:solidFill>
                   <a:srgbClr val="FFFFFF"/>
                 </a:solidFill>
@@ -3956,12 +3856,12 @@
       </p:sp>
       <p:sp>
         <p:nvSpPr>
-          <p:cNvPr name="TextBox 16" id="16"/>
-          <p:cNvSpPr txBox="true"/>
+          <p:cNvPr id="16" name="TextBox 16"/>
+          <p:cNvSpPr txBox="1"/>
           <p:nvPr/>
         </p:nvSpPr>
         <p:spPr>
-          <a:xfrm rot="0">
+          <a:xfrm>
             <a:off x="1009650" y="6195027"/>
             <a:ext cx="6029114" cy="600075"/>
           </a:xfrm>
@@ -3970,7 +3870,7 @@
           </a:prstGeom>
         </p:spPr>
         <p:txBody>
-          <a:bodyPr anchor="t" rtlCol="false" tIns="0" lIns="0" bIns="0" rIns="0">
+          <a:bodyPr lIns="0" tIns="0" rIns="0" bIns="0" rtlCol="0" anchor="t">
             <a:spAutoFit/>
           </a:bodyPr>
           <a:lstStyle/>
@@ -3981,7 +3881,7 @@
               </a:lnSpc>
             </a:pPr>
             <a:r>
-              <a:rPr lang="en-US" sz="3999" b="true">
+              <a:rPr lang="en-US" sz="3999" b="1">
                 <a:solidFill>
                   <a:srgbClr val="03B8E1"/>
                 </a:solidFill>
@@ -3997,12 +3897,12 @@
       </p:sp>
       <p:sp>
         <p:nvSpPr>
-          <p:cNvPr name="TextBox 17" id="17"/>
-          <p:cNvSpPr txBox="true"/>
+          <p:cNvPr id="17" name="TextBox 17"/>
+          <p:cNvSpPr txBox="1"/>
           <p:nvPr/>
         </p:nvSpPr>
         <p:spPr>
-          <a:xfrm rot="0">
+          <a:xfrm>
             <a:off x="990600" y="4948238"/>
             <a:ext cx="2149896" cy="600075"/>
           </a:xfrm>
@@ -4011,7 +3911,7 @@
           </a:prstGeom>
         </p:spPr>
         <p:txBody>
-          <a:bodyPr anchor="t" rtlCol="false" tIns="0" lIns="0" bIns="0" rIns="0">
+          <a:bodyPr lIns="0" tIns="0" rIns="0" bIns="0" rtlCol="0" anchor="t">
             <a:spAutoFit/>
           </a:bodyPr>
           <a:lstStyle/>
@@ -4022,7 +3922,7 @@
               </a:lnSpc>
             </a:pPr>
             <a:r>
-              <a:rPr lang="en-US" b="true" sz="3999">
+              <a:rPr lang="en-US" sz="3999" b="1">
                 <a:solidFill>
                   <a:srgbClr val="03B8E1"/>
                 </a:solidFill>
@@ -4045,7 +3945,7 @@
 </file>
 
 <file path=ppt/slides/slide3.xml><?xml version="1.0" encoding="utf-8"?>
-<p:sld xmlns:p="http://schemas.openxmlformats.org/presentationml/2006/main" xmlns:a="http://schemas.openxmlformats.org/drawingml/2006/main" xmlns:r="http://schemas.openxmlformats.org/officeDocument/2006/relationships">
+<p:sld xmlns:a="http://schemas.openxmlformats.org/drawingml/2006/main" xmlns:r="http://schemas.openxmlformats.org/officeDocument/2006/relationships" xmlns:p="http://schemas.openxmlformats.org/presentationml/2006/main">
   <p:cSld>
     <p:spTree>
       <p:nvGrpSpPr>
@@ -4063,12 +3963,12 @@
       </p:grpSpPr>
       <p:sp>
         <p:nvSpPr>
-          <p:cNvPr name="Freeform 2" id="2"/>
+          <p:cNvPr id="2" name="Freeform 2"/>
           <p:cNvSpPr/>
           <p:nvPr/>
         </p:nvSpPr>
         <p:spPr>
-          <a:xfrm flipH="false" flipV="false" rot="0">
+          <a:xfrm>
             <a:off x="0" y="-30260"/>
             <a:ext cx="18288000" cy="10317260"/>
           </a:xfrm>
@@ -4077,9 +3977,9 @@
             <a:gdLst/>
             <a:ahLst/>
             <a:cxnLst/>
-            <a:rect r="r" b="b" t="t" l="l"/>
+            <a:rect l="l" t="t" r="r" b="b"/>
             <a:pathLst>
-              <a:path h="10317260" w="18288000">
+              <a:path w="18288000" h="10317260">
                 <a:moveTo>
                   <a:pt x="0" y="0"/>
                 </a:moveTo>
@@ -4102,19 +4002,19 @@
           <a:blipFill>
             <a:blip r:embed="rId2"/>
             <a:stretch>
-              <a:fillRect l="0" t="-12704" r="0" b="-12704"/>
+              <a:fillRect t="-12704" b="-12704"/>
             </a:stretch>
           </a:blipFill>
         </p:spPr>
       </p:sp>
       <p:sp>
         <p:nvSpPr>
-          <p:cNvPr name="Freeform 3" id="3"/>
+          <p:cNvPr id="3" name="Freeform 3"/>
           <p:cNvSpPr/>
           <p:nvPr/>
         </p:nvSpPr>
         <p:spPr>
-          <a:xfrm flipH="false" flipV="false" rot="0">
+          <a:xfrm>
             <a:off x="471693" y="607491"/>
             <a:ext cx="2241928" cy="789345"/>
           </a:xfrm>
@@ -4123,9 +4023,9 @@
             <a:gdLst/>
             <a:ahLst/>
             <a:cxnLst/>
-            <a:rect r="r" b="b" t="t" l="l"/>
+            <a:rect l="l" t="t" r="r" b="b"/>
             <a:pathLst>
-              <a:path h="789345" w="2241928">
+              <a:path w="2241928" h="789345">
                 <a:moveTo>
                   <a:pt x="0" y="0"/>
                 </a:moveTo>
@@ -4154,19 +4054,19 @@
               </a:extLst>
             </a:blip>
             <a:stretch>
-              <a:fillRect l="0" t="0" r="0" b="0"/>
+              <a:fillRect/>
             </a:stretch>
           </a:blipFill>
         </p:spPr>
       </p:sp>
       <p:grpSp>
         <p:nvGrpSpPr>
-          <p:cNvPr name="Group 4" id="4"/>
+          <p:cNvPr id="4" name="Group 4"/>
           <p:cNvGrpSpPr/>
           <p:nvPr/>
         </p:nvGrpSpPr>
         <p:grpSpPr>
-          <a:xfrm rot="0">
+          <a:xfrm>
             <a:off x="471693" y="1897749"/>
             <a:ext cx="17344614" cy="8120173"/>
             <a:chOff x="0" y="0"/>
@@ -4175,12 +4075,12 @@
         </p:grpSpPr>
         <p:sp>
           <p:nvSpPr>
-            <p:cNvPr name="Freeform 5" id="5"/>
+            <p:cNvPr id="5" name="Freeform 5"/>
             <p:cNvSpPr/>
             <p:nvPr/>
           </p:nvSpPr>
           <p:spPr>
-            <a:xfrm flipH="false" flipV="false" rot="0">
+            <a:xfrm>
               <a:off x="0" y="0"/>
               <a:ext cx="4568129" cy="2138647"/>
             </a:xfrm>
@@ -4189,9 +4089,9 @@
               <a:gdLst/>
               <a:ahLst/>
               <a:cxnLst/>
-              <a:rect r="r" b="b" t="t" l="l"/>
+              <a:rect l="l" t="t" r="r" b="b"/>
               <a:pathLst>
-                <a:path h="2138647" w="4568129">
+                <a:path w="4568129" h="2138647">
                   <a:moveTo>
                     <a:pt x="22764" y="0"/>
                   </a:moveTo>
@@ -4260,8 +4160,8 @@
         </p:sp>
         <p:sp>
           <p:nvSpPr>
-            <p:cNvPr name="TextBox 6" id="6"/>
-            <p:cNvSpPr txBox="true"/>
+            <p:cNvPr id="6" name="TextBox 6"/>
+            <p:cNvSpPr txBox="1"/>
             <p:nvPr/>
           </p:nvSpPr>
           <p:spPr>
@@ -4274,7 +4174,7 @@
             </a:prstGeom>
           </p:spPr>
           <p:txBody>
-            <a:bodyPr anchor="ctr" rtlCol="false" tIns="50800" lIns="50800" bIns="50800" rIns="50800"/>
+            <a:bodyPr lIns="50800" tIns="50800" rIns="50800" bIns="50800" rtlCol="0" anchor="ctr"/>
             <a:lstStyle/>
             <a:p>
               <a:pPr algn="ctr">
@@ -4282,18 +4182,19 @@
                   <a:spcPts val="2800"/>
                 </a:lnSpc>
               </a:pPr>
+              <a:endParaRPr/>
             </a:p>
           </p:txBody>
         </p:sp>
       </p:grpSp>
       <p:sp>
         <p:nvSpPr>
-          <p:cNvPr name="Freeform 7" id="7"/>
+          <p:cNvPr id="7" name="Freeform 7"/>
           <p:cNvSpPr/>
           <p:nvPr/>
         </p:nvSpPr>
         <p:spPr>
-          <a:xfrm flipH="false" flipV="false" rot="0">
+          <a:xfrm>
             <a:off x="14279498" y="573541"/>
             <a:ext cx="3536809" cy="823295"/>
           </a:xfrm>
@@ -4302,9 +4203,9 @@
             <a:gdLst/>
             <a:ahLst/>
             <a:cxnLst/>
-            <a:rect r="r" b="b" t="t" l="l"/>
+            <a:rect l="l" t="t" r="r" b="b"/>
             <a:pathLst>
-              <a:path h="823295" w="3536809">
+              <a:path w="3536809" h="823295">
                 <a:moveTo>
                   <a:pt x="0" y="0"/>
                 </a:moveTo>
@@ -4327,19 +4228,19 @@
           <a:blipFill>
             <a:blip r:embed="rId5"/>
             <a:stretch>
-              <a:fillRect l="0" t="0" r="0" b="0"/>
+              <a:fillRect/>
             </a:stretch>
           </a:blipFill>
         </p:spPr>
       </p:sp>
       <p:sp>
         <p:nvSpPr>
-          <p:cNvPr name="TextBox 8" id="8"/>
-          <p:cNvSpPr txBox="true"/>
+          <p:cNvPr id="8" name="TextBox 8"/>
+          <p:cNvSpPr txBox="1"/>
           <p:nvPr/>
         </p:nvSpPr>
         <p:spPr>
-          <a:xfrm rot="0">
+          <a:xfrm>
             <a:off x="669540" y="803726"/>
             <a:ext cx="1846233" cy="349250"/>
           </a:xfrm>
@@ -4348,7 +4249,7 @@
           </a:prstGeom>
         </p:spPr>
         <p:txBody>
-          <a:bodyPr anchor="t" rtlCol="false" tIns="0" lIns="0" bIns="0" rIns="0">
+          <a:bodyPr lIns="0" tIns="0" rIns="0" bIns="0" rtlCol="0" anchor="t">
             <a:spAutoFit/>
           </a:bodyPr>
           <a:lstStyle/>
@@ -4359,7 +4260,7 @@
               </a:lnSpc>
             </a:pPr>
             <a:r>
-              <a:rPr lang="en-US" sz="2000" b="true">
+              <a:rPr lang="en-US" sz="2000" b="1" dirty="0">
                 <a:solidFill>
                   <a:srgbClr val="FFFFFF"/>
                 </a:solidFill>
@@ -4375,12 +4276,12 @@
       </p:sp>
       <p:sp>
         <p:nvSpPr>
-          <p:cNvPr name="TextBox 9" id="9"/>
-          <p:cNvSpPr txBox="true"/>
+          <p:cNvPr id="9" name="TextBox 9"/>
+          <p:cNvSpPr txBox="1"/>
           <p:nvPr/>
         </p:nvSpPr>
         <p:spPr>
-          <a:xfrm rot="0">
+          <a:xfrm>
             <a:off x="4832355" y="568161"/>
             <a:ext cx="8623290" cy="828675"/>
           </a:xfrm>
@@ -4389,7 +4290,7 @@
           </a:prstGeom>
         </p:spPr>
         <p:txBody>
-          <a:bodyPr anchor="t" rtlCol="false" tIns="0" lIns="0" bIns="0" rIns="0">
+          <a:bodyPr lIns="0" tIns="0" rIns="0" bIns="0" rtlCol="0" anchor="t">
             <a:spAutoFit/>
           </a:bodyPr>
           <a:lstStyle/>
@@ -4403,7 +4304,7 @@
               </a:spcBef>
             </a:pPr>
             <a:r>
-              <a:rPr lang="en-US" b="true" sz="5499">
+              <a:rPr lang="en-US" sz="5499" b="1">
                 <a:solidFill>
                   <a:srgbClr val="FFFFFF"/>
                 </a:solidFill>
@@ -4419,12 +4320,12 @@
       </p:sp>
       <p:sp>
         <p:nvSpPr>
-          <p:cNvPr name="TextBox 10" id="10"/>
-          <p:cNvSpPr txBox="true"/>
+          <p:cNvPr id="10" name="TextBox 10"/>
+          <p:cNvSpPr txBox="1"/>
           <p:nvPr/>
         </p:nvSpPr>
         <p:spPr>
-          <a:xfrm rot="0">
+          <a:xfrm>
             <a:off x="714988" y="2716383"/>
             <a:ext cx="12409017" cy="1076325"/>
           </a:xfrm>
@@ -4433,12 +4334,12 @@
           </a:prstGeom>
         </p:spPr>
         <p:txBody>
-          <a:bodyPr anchor="t" rtlCol="false" tIns="0" lIns="0" bIns="0" rIns="0">
+          <a:bodyPr lIns="0" tIns="0" rIns="0" bIns="0" rtlCol="0" anchor="t">
             <a:spAutoFit/>
           </a:bodyPr>
           <a:lstStyle/>
           <a:p>
-            <a:pPr algn="l" marL="755652" indent="-377826" lvl="1">
+            <a:pPr marL="755652" lvl="1" indent="-377826" algn="l">
               <a:lnSpc>
                 <a:spcPts val="4200"/>
               </a:lnSpc>
@@ -4458,7 +4359,7 @@
               <a:t>Explain the </a:t>
             </a:r>
             <a:r>
-              <a:rPr lang="en-US" b="true" sz="3500">
+              <a:rPr lang="en-US" sz="3500" b="1">
                 <a:solidFill>
                   <a:srgbClr val="03B8E1"/>
                 </a:solidFill>
@@ -4471,7 +4372,7 @@
             </a:r>
           </a:p>
           <a:p>
-            <a:pPr algn="l" marL="755652" indent="-377826" lvl="1">
+            <a:pPr marL="755652" lvl="1" indent="-377826" algn="l">
               <a:lnSpc>
                 <a:spcPts val="4200"/>
               </a:lnSpc>
@@ -4488,22 +4389,10 @@
                 <a:cs typeface="Neue Montreal"/>
                 <a:sym typeface="Neue Montreal"/>
               </a:rPr>
-              <a:t>H</a:t>
-            </a:r>
-            <a:r>
-              <a:rPr lang="en-US" sz="3500">
-                <a:solidFill>
-                  <a:srgbClr val="000000"/>
-                </a:solidFill>
-                <a:latin typeface="Neue Montreal"/>
-                <a:ea typeface="Neue Montreal"/>
-                <a:cs typeface="Neue Montreal"/>
-                <a:sym typeface="Neue Montreal"/>
-              </a:rPr>
-              <a:t>ow the problem relates to the chosen</a:t>
-            </a:r>
-            <a:r>
-              <a:rPr lang="en-US" b="true" sz="3500">
+              <a:t>How the problem relates to the chosen</a:t>
+            </a:r>
+            <a:r>
+              <a:rPr lang="en-US" sz="3500" b="1">
                 <a:solidFill>
                   <a:srgbClr val="03B8E1"/>
                 </a:solidFill>
@@ -4526,7 +4415,7 @@
 </file>
 
 <file path=ppt/slides/slide4.xml><?xml version="1.0" encoding="utf-8"?>
-<p:sld xmlns:p="http://schemas.openxmlformats.org/presentationml/2006/main" xmlns:a="http://schemas.openxmlformats.org/drawingml/2006/main" xmlns:r="http://schemas.openxmlformats.org/officeDocument/2006/relationships">
+<p:sld xmlns:a="http://schemas.openxmlformats.org/drawingml/2006/main" xmlns:r="http://schemas.openxmlformats.org/officeDocument/2006/relationships" xmlns:p="http://schemas.openxmlformats.org/presentationml/2006/main">
   <p:cSld>
     <p:spTree>
       <p:nvGrpSpPr>
@@ -4544,12 +4433,12 @@
       </p:grpSpPr>
       <p:sp>
         <p:nvSpPr>
-          <p:cNvPr name="Freeform 2" id="2"/>
+          <p:cNvPr id="2" name="Freeform 2"/>
           <p:cNvSpPr/>
           <p:nvPr/>
         </p:nvSpPr>
         <p:spPr>
-          <a:xfrm flipH="false" flipV="false" rot="0">
+          <a:xfrm>
             <a:off x="0" y="-30260"/>
             <a:ext cx="18288000" cy="10317260"/>
           </a:xfrm>
@@ -4558,9 +4447,9 @@
             <a:gdLst/>
             <a:ahLst/>
             <a:cxnLst/>
-            <a:rect r="r" b="b" t="t" l="l"/>
+            <a:rect l="l" t="t" r="r" b="b"/>
             <a:pathLst>
-              <a:path h="10317260" w="18288000">
+              <a:path w="18288000" h="10317260">
                 <a:moveTo>
                   <a:pt x="0" y="0"/>
                 </a:moveTo>
@@ -4583,19 +4472,19 @@
           <a:blipFill>
             <a:blip r:embed="rId2"/>
             <a:stretch>
-              <a:fillRect l="0" t="-12704" r="0" b="-12704"/>
+              <a:fillRect t="-12704" b="-12704"/>
             </a:stretch>
           </a:blipFill>
         </p:spPr>
       </p:sp>
       <p:sp>
         <p:nvSpPr>
-          <p:cNvPr name="Freeform 3" id="3"/>
+          <p:cNvPr id="3" name="Freeform 3"/>
           <p:cNvSpPr/>
           <p:nvPr/>
         </p:nvSpPr>
         <p:spPr>
-          <a:xfrm flipH="false" flipV="false" rot="0">
+          <a:xfrm>
             <a:off x="471693" y="607491"/>
             <a:ext cx="2241928" cy="789345"/>
           </a:xfrm>
@@ -4604,9 +4493,9 @@
             <a:gdLst/>
             <a:ahLst/>
             <a:cxnLst/>
-            <a:rect r="r" b="b" t="t" l="l"/>
+            <a:rect l="l" t="t" r="r" b="b"/>
             <a:pathLst>
-              <a:path h="789345" w="2241928">
+              <a:path w="2241928" h="789345">
                 <a:moveTo>
                   <a:pt x="0" y="0"/>
                 </a:moveTo>
@@ -4635,19 +4524,19 @@
               </a:extLst>
             </a:blip>
             <a:stretch>
-              <a:fillRect l="0" t="0" r="0" b="0"/>
+              <a:fillRect/>
             </a:stretch>
           </a:blipFill>
         </p:spPr>
       </p:sp>
       <p:grpSp>
         <p:nvGrpSpPr>
-          <p:cNvPr name="Group 4" id="4"/>
+          <p:cNvPr id="4" name="Group 4"/>
           <p:cNvGrpSpPr/>
           <p:nvPr/>
         </p:nvGrpSpPr>
         <p:grpSpPr>
-          <a:xfrm rot="0">
+          <a:xfrm>
             <a:off x="471693" y="1897749"/>
             <a:ext cx="17344614" cy="8120173"/>
             <a:chOff x="0" y="0"/>
@@ -4656,12 +4545,12 @@
         </p:grpSpPr>
         <p:sp>
           <p:nvSpPr>
-            <p:cNvPr name="Freeform 5" id="5"/>
+            <p:cNvPr id="5" name="Freeform 5"/>
             <p:cNvSpPr/>
             <p:nvPr/>
           </p:nvSpPr>
           <p:spPr>
-            <a:xfrm flipH="false" flipV="false" rot="0">
+            <a:xfrm>
               <a:off x="0" y="0"/>
               <a:ext cx="4568129" cy="2138647"/>
             </a:xfrm>
@@ -4670,9 +4559,9 @@
               <a:gdLst/>
               <a:ahLst/>
               <a:cxnLst/>
-              <a:rect r="r" b="b" t="t" l="l"/>
+              <a:rect l="l" t="t" r="r" b="b"/>
               <a:pathLst>
-                <a:path h="2138647" w="4568129">
+                <a:path w="4568129" h="2138647">
                   <a:moveTo>
                     <a:pt x="22764" y="0"/>
                   </a:moveTo>
@@ -4741,8 +4630,8 @@
         </p:sp>
         <p:sp>
           <p:nvSpPr>
-            <p:cNvPr name="TextBox 6" id="6"/>
-            <p:cNvSpPr txBox="true"/>
+            <p:cNvPr id="6" name="TextBox 6"/>
+            <p:cNvSpPr txBox="1"/>
             <p:nvPr/>
           </p:nvSpPr>
           <p:spPr>
@@ -4755,7 +4644,7 @@
             </a:prstGeom>
           </p:spPr>
           <p:txBody>
-            <a:bodyPr anchor="ctr" rtlCol="false" tIns="50800" lIns="50800" bIns="50800" rIns="50800"/>
+            <a:bodyPr lIns="50800" tIns="50800" rIns="50800" bIns="50800" rtlCol="0" anchor="ctr"/>
             <a:lstStyle/>
             <a:p>
               <a:pPr algn="ctr">
@@ -4763,18 +4652,19 @@
                   <a:spcPts val="2800"/>
                 </a:lnSpc>
               </a:pPr>
+              <a:endParaRPr/>
             </a:p>
           </p:txBody>
         </p:sp>
       </p:grpSp>
       <p:sp>
         <p:nvSpPr>
-          <p:cNvPr name="TextBox 7" id="7"/>
-          <p:cNvSpPr txBox="true"/>
+          <p:cNvPr id="7" name="TextBox 7"/>
+          <p:cNvSpPr txBox="1"/>
           <p:nvPr/>
         </p:nvSpPr>
         <p:spPr>
-          <a:xfrm rot="0">
+          <a:xfrm>
             <a:off x="771915" y="803726"/>
             <a:ext cx="1641483" cy="349250"/>
           </a:xfrm>
@@ -4783,7 +4673,7 @@
           </a:prstGeom>
         </p:spPr>
         <p:txBody>
-          <a:bodyPr anchor="t" rtlCol="false" tIns="0" lIns="0" bIns="0" rIns="0">
+          <a:bodyPr lIns="0" tIns="0" rIns="0" bIns="0" rtlCol="0" anchor="t">
             <a:spAutoFit/>
           </a:bodyPr>
           <a:lstStyle/>
@@ -4794,7 +4684,7 @@
               </a:lnSpc>
             </a:pPr>
             <a:r>
-              <a:rPr lang="en-US" sz="2000" b="true">
+              <a:rPr lang="en-US" sz="2000" b="1">
                 <a:solidFill>
                   <a:srgbClr val="FFFFFF"/>
                 </a:solidFill>
@@ -4810,12 +4700,12 @@
       </p:sp>
       <p:sp>
         <p:nvSpPr>
-          <p:cNvPr name="Freeform 8" id="8"/>
+          <p:cNvPr id="8" name="Freeform 8"/>
           <p:cNvSpPr/>
           <p:nvPr/>
         </p:nvSpPr>
         <p:spPr>
-          <a:xfrm flipH="false" flipV="false" rot="0">
+          <a:xfrm>
             <a:off x="14279498" y="573541"/>
             <a:ext cx="3536809" cy="823295"/>
           </a:xfrm>
@@ -4824,9 +4714,9 @@
             <a:gdLst/>
             <a:ahLst/>
             <a:cxnLst/>
-            <a:rect r="r" b="b" t="t" l="l"/>
+            <a:rect l="l" t="t" r="r" b="b"/>
             <a:pathLst>
-              <a:path h="823295" w="3536809">
+              <a:path w="3536809" h="823295">
                 <a:moveTo>
                   <a:pt x="0" y="0"/>
                 </a:moveTo>
@@ -4849,19 +4739,19 @@
           <a:blipFill>
             <a:blip r:embed="rId5"/>
             <a:stretch>
-              <a:fillRect l="0" t="0" r="0" b="0"/>
+              <a:fillRect/>
             </a:stretch>
           </a:blipFill>
         </p:spPr>
       </p:sp>
       <p:sp>
         <p:nvSpPr>
-          <p:cNvPr name="TextBox 9" id="9"/>
-          <p:cNvSpPr txBox="true"/>
+          <p:cNvPr id="9" name="TextBox 9"/>
+          <p:cNvSpPr txBox="1"/>
           <p:nvPr/>
         </p:nvSpPr>
         <p:spPr>
-          <a:xfrm rot="0">
+          <a:xfrm>
             <a:off x="4936597" y="568161"/>
             <a:ext cx="8414806" cy="828675"/>
           </a:xfrm>
@@ -4870,7 +4760,7 @@
           </a:prstGeom>
         </p:spPr>
         <p:txBody>
-          <a:bodyPr anchor="t" rtlCol="false" tIns="0" lIns="0" bIns="0" rIns="0">
+          <a:bodyPr lIns="0" tIns="0" rIns="0" bIns="0" rtlCol="0" anchor="t">
             <a:spAutoFit/>
           </a:bodyPr>
           <a:lstStyle/>
@@ -4884,7 +4774,7 @@
               </a:spcBef>
             </a:pPr>
             <a:r>
-              <a:rPr lang="en-US" b="true" sz="5499">
+              <a:rPr lang="en-US" sz="5499" b="1">
                 <a:solidFill>
                   <a:srgbClr val="FFFFFF"/>
                 </a:solidFill>
@@ -4900,12 +4790,12 @@
       </p:sp>
       <p:sp>
         <p:nvSpPr>
-          <p:cNvPr name="TextBox 10" id="10"/>
-          <p:cNvSpPr txBox="true"/>
+          <p:cNvPr id="10" name="TextBox 10"/>
+          <p:cNvSpPr txBox="1"/>
           <p:nvPr/>
         </p:nvSpPr>
         <p:spPr>
-          <a:xfrm rot="0">
+          <a:xfrm>
             <a:off x="705463" y="2716383"/>
             <a:ext cx="14358255" cy="2143125"/>
           </a:xfrm>
@@ -4914,12 +4804,12 @@
           </a:prstGeom>
         </p:spPr>
         <p:txBody>
-          <a:bodyPr anchor="t" rtlCol="false" tIns="0" lIns="0" bIns="0" rIns="0">
+          <a:bodyPr lIns="0" tIns="0" rIns="0" bIns="0" rtlCol="0" anchor="t">
             <a:spAutoFit/>
           </a:bodyPr>
           <a:lstStyle/>
           <a:p>
-            <a:pPr algn="l" marL="755652" indent="-377826" lvl="1">
+            <a:pPr marL="755652" lvl="1" indent="-377826" algn="l">
               <a:lnSpc>
                 <a:spcPts val="4200"/>
               </a:lnSpc>
@@ -4954,7 +4844,7 @@
               <a:t> </a:t>
             </a:r>
             <a:r>
-              <a:rPr lang="en-US" b="true" sz="3500">
+              <a:rPr lang="en-US" sz="3500" b="1">
                 <a:solidFill>
                   <a:srgbClr val="03B8E1"/>
                 </a:solidFill>
@@ -4963,23 +4853,11 @@
                 <a:cs typeface="Neue Montreal Bold"/>
                 <a:sym typeface="Neue Montreal Bold"/>
               </a:rPr>
-              <a:t>effectively addresses the identifi</a:t>
-            </a:r>
-            <a:r>
-              <a:rPr lang="en-US" b="true" sz="3500">
-                <a:solidFill>
-                  <a:srgbClr val="03B8E1"/>
-                </a:solidFill>
-                <a:latin typeface="Neue Montreal Bold"/>
-                <a:ea typeface="Neue Montreal Bold"/>
-                <a:cs typeface="Neue Montreal Bold"/>
-                <a:sym typeface="Neue Montreal Bold"/>
-              </a:rPr>
-              <a:t>ed problem.</a:t>
-            </a:r>
-          </a:p>
-          <a:p>
-            <a:pPr algn="l" marL="755652" indent="-377826" lvl="1">
+              <a:t>effectively addresses the identified problem.</a:t>
+            </a:r>
+          </a:p>
+          <a:p>
+            <a:pPr marL="755652" lvl="1" indent="-377826" algn="l">
               <a:lnSpc>
                 <a:spcPts val="4200"/>
               </a:lnSpc>
@@ -4990,7 +4868,7 @@
               <a:buChar char="•"/>
             </a:pPr>
             <a:r>
-              <a:rPr lang="en-US" b="true" sz="3500">
+              <a:rPr lang="en-US" sz="3500" b="1">
                 <a:solidFill>
                   <a:srgbClr val="03B8E1"/>
                 </a:solidFill>
@@ -5035,6 +4913,15 @@
                 <a:spcPct val="0"/>
               </a:spcBef>
             </a:pPr>
+            <a:endParaRPr lang="en-US" sz="3500">
+              <a:solidFill>
+                <a:srgbClr val="000000"/>
+              </a:solidFill>
+              <a:latin typeface="Neue Montreal"/>
+              <a:ea typeface="Neue Montreal"/>
+              <a:cs typeface="Neue Montreal"/>
+              <a:sym typeface="Neue Montreal"/>
+            </a:endParaRPr>
           </a:p>
         </p:txBody>
       </p:sp>
@@ -5047,7 +4934,7 @@
 </file>
 
 <file path=ppt/slides/slide5.xml><?xml version="1.0" encoding="utf-8"?>
-<p:sld xmlns:p="http://schemas.openxmlformats.org/presentationml/2006/main" xmlns:a="http://schemas.openxmlformats.org/drawingml/2006/main" xmlns:r="http://schemas.openxmlformats.org/officeDocument/2006/relationships">
+<p:sld xmlns:a="http://schemas.openxmlformats.org/drawingml/2006/main" xmlns:r="http://schemas.openxmlformats.org/officeDocument/2006/relationships" xmlns:p="http://schemas.openxmlformats.org/presentationml/2006/main">
   <p:cSld>
     <p:spTree>
       <p:nvGrpSpPr>
@@ -5065,12 +4952,12 @@
       </p:grpSpPr>
       <p:sp>
         <p:nvSpPr>
-          <p:cNvPr name="Freeform 2" id="2"/>
+          <p:cNvPr id="2" name="Freeform 2"/>
           <p:cNvSpPr/>
           <p:nvPr/>
         </p:nvSpPr>
         <p:spPr>
-          <a:xfrm flipH="false" flipV="false" rot="0">
+          <a:xfrm>
             <a:off x="0" y="-30260"/>
             <a:ext cx="18288000" cy="10317260"/>
           </a:xfrm>
@@ -5079,9 +4966,9 @@
             <a:gdLst/>
             <a:ahLst/>
             <a:cxnLst/>
-            <a:rect r="r" b="b" t="t" l="l"/>
+            <a:rect l="l" t="t" r="r" b="b"/>
             <a:pathLst>
-              <a:path h="10317260" w="18288000">
+              <a:path w="18288000" h="10317260">
                 <a:moveTo>
                   <a:pt x="0" y="0"/>
                 </a:moveTo>
@@ -5104,19 +4991,19 @@
           <a:blipFill>
             <a:blip r:embed="rId2"/>
             <a:stretch>
-              <a:fillRect l="0" t="-12704" r="0" b="-12704"/>
+              <a:fillRect t="-12704" b="-12704"/>
             </a:stretch>
           </a:blipFill>
         </p:spPr>
       </p:sp>
       <p:sp>
         <p:nvSpPr>
-          <p:cNvPr name="Freeform 3" id="3"/>
+          <p:cNvPr id="3" name="Freeform 3"/>
           <p:cNvSpPr/>
           <p:nvPr/>
         </p:nvSpPr>
         <p:spPr>
-          <a:xfrm flipH="false" flipV="false" rot="0">
+          <a:xfrm>
             <a:off x="471693" y="607491"/>
             <a:ext cx="2241928" cy="789345"/>
           </a:xfrm>
@@ -5125,9 +5012,9 @@
             <a:gdLst/>
             <a:ahLst/>
             <a:cxnLst/>
-            <a:rect r="r" b="b" t="t" l="l"/>
+            <a:rect l="l" t="t" r="r" b="b"/>
             <a:pathLst>
-              <a:path h="789345" w="2241928">
+              <a:path w="2241928" h="789345">
                 <a:moveTo>
                   <a:pt x="0" y="0"/>
                 </a:moveTo>
@@ -5156,19 +5043,19 @@
               </a:extLst>
             </a:blip>
             <a:stretch>
-              <a:fillRect l="0" t="0" r="0" b="0"/>
+              <a:fillRect/>
             </a:stretch>
           </a:blipFill>
         </p:spPr>
       </p:sp>
       <p:grpSp>
         <p:nvGrpSpPr>
-          <p:cNvPr name="Group 4" id="4"/>
+          <p:cNvPr id="4" name="Group 4"/>
           <p:cNvGrpSpPr/>
           <p:nvPr/>
         </p:nvGrpSpPr>
         <p:grpSpPr>
-          <a:xfrm rot="0">
+          <a:xfrm>
             <a:off x="471693" y="1897749"/>
             <a:ext cx="17344614" cy="8120173"/>
             <a:chOff x="0" y="0"/>
@@ -5177,12 +5064,12 @@
         </p:grpSpPr>
         <p:sp>
           <p:nvSpPr>
-            <p:cNvPr name="Freeform 5" id="5"/>
+            <p:cNvPr id="5" name="Freeform 5"/>
             <p:cNvSpPr/>
             <p:nvPr/>
           </p:nvSpPr>
           <p:spPr>
-            <a:xfrm flipH="false" flipV="false" rot="0">
+            <a:xfrm>
               <a:off x="0" y="0"/>
               <a:ext cx="4568129" cy="2138647"/>
             </a:xfrm>
@@ -5191,9 +5078,9 @@
               <a:gdLst/>
               <a:ahLst/>
               <a:cxnLst/>
-              <a:rect r="r" b="b" t="t" l="l"/>
+              <a:rect l="l" t="t" r="r" b="b"/>
               <a:pathLst>
-                <a:path h="2138647" w="4568129">
+                <a:path w="4568129" h="2138647">
                   <a:moveTo>
                     <a:pt x="22764" y="0"/>
                   </a:moveTo>
@@ -5262,8 +5149,8 @@
         </p:sp>
         <p:sp>
           <p:nvSpPr>
-            <p:cNvPr name="TextBox 6" id="6"/>
-            <p:cNvSpPr txBox="true"/>
+            <p:cNvPr id="6" name="TextBox 6"/>
+            <p:cNvSpPr txBox="1"/>
             <p:nvPr/>
           </p:nvSpPr>
           <p:spPr>
@@ -5276,7 +5163,7 @@
             </a:prstGeom>
           </p:spPr>
           <p:txBody>
-            <a:bodyPr anchor="ctr" rtlCol="false" tIns="50800" lIns="50800" bIns="50800" rIns="50800"/>
+            <a:bodyPr lIns="50800" tIns="50800" rIns="50800" bIns="50800" rtlCol="0" anchor="ctr"/>
             <a:lstStyle/>
             <a:p>
               <a:pPr algn="ctr">
@@ -5284,18 +5171,19 @@
                   <a:spcPts val="2800"/>
                 </a:lnSpc>
               </a:pPr>
+              <a:endParaRPr/>
             </a:p>
           </p:txBody>
         </p:sp>
       </p:grpSp>
       <p:sp>
         <p:nvSpPr>
-          <p:cNvPr name="TextBox 7" id="7"/>
-          <p:cNvSpPr txBox="true"/>
+          <p:cNvPr id="7" name="TextBox 7"/>
+          <p:cNvSpPr txBox="1"/>
           <p:nvPr/>
         </p:nvSpPr>
         <p:spPr>
-          <a:xfrm rot="0">
+          <a:xfrm>
             <a:off x="748047" y="803726"/>
             <a:ext cx="1689219" cy="349250"/>
           </a:xfrm>
@@ -5304,7 +5192,7 @@
           </a:prstGeom>
         </p:spPr>
         <p:txBody>
-          <a:bodyPr anchor="t" rtlCol="false" tIns="0" lIns="0" bIns="0" rIns="0">
+          <a:bodyPr lIns="0" tIns="0" rIns="0" bIns="0" rtlCol="0" anchor="t">
             <a:spAutoFit/>
           </a:bodyPr>
           <a:lstStyle/>
@@ -5315,7 +5203,7 @@
               </a:lnSpc>
             </a:pPr>
             <a:r>
-              <a:rPr lang="en-US" sz="2000" b="true">
+              <a:rPr lang="en-US" sz="2000" b="1">
                 <a:solidFill>
                   <a:srgbClr val="FFFFFF"/>
                 </a:solidFill>
@@ -5331,12 +5219,12 @@
       </p:sp>
       <p:sp>
         <p:nvSpPr>
-          <p:cNvPr name="Freeform 8" id="8"/>
+          <p:cNvPr id="8" name="Freeform 8"/>
           <p:cNvSpPr/>
           <p:nvPr/>
         </p:nvSpPr>
         <p:spPr>
-          <a:xfrm flipH="false" flipV="false" rot="0">
+          <a:xfrm>
             <a:off x="14279498" y="573541"/>
             <a:ext cx="3536809" cy="823295"/>
           </a:xfrm>
@@ -5345,9 +5233,9 @@
             <a:gdLst/>
             <a:ahLst/>
             <a:cxnLst/>
-            <a:rect r="r" b="b" t="t" l="l"/>
+            <a:rect l="l" t="t" r="r" b="b"/>
             <a:pathLst>
-              <a:path h="823295" w="3536809">
+              <a:path w="3536809" h="823295">
                 <a:moveTo>
                   <a:pt x="0" y="0"/>
                 </a:moveTo>
@@ -5370,19 +5258,19 @@
           <a:blipFill>
             <a:blip r:embed="rId5"/>
             <a:stretch>
-              <a:fillRect l="0" t="0" r="0" b="0"/>
+              <a:fillRect/>
             </a:stretch>
           </a:blipFill>
         </p:spPr>
       </p:sp>
       <p:sp>
         <p:nvSpPr>
-          <p:cNvPr name="TextBox 9" id="9"/>
-          <p:cNvSpPr txBox="true"/>
+          <p:cNvPr id="9" name="TextBox 9"/>
+          <p:cNvSpPr txBox="1"/>
           <p:nvPr/>
         </p:nvSpPr>
         <p:spPr>
-          <a:xfrm rot="0">
+          <a:xfrm>
             <a:off x="6628677" y="568161"/>
             <a:ext cx="5040117" cy="828675"/>
           </a:xfrm>
@@ -5391,7 +5279,7 @@
           </a:prstGeom>
         </p:spPr>
         <p:txBody>
-          <a:bodyPr anchor="t" rtlCol="false" tIns="0" lIns="0" bIns="0" rIns="0">
+          <a:bodyPr lIns="0" tIns="0" rIns="0" bIns="0" rtlCol="0" anchor="t">
             <a:spAutoFit/>
           </a:bodyPr>
           <a:lstStyle/>
@@ -5405,7 +5293,7 @@
               </a:spcBef>
             </a:pPr>
             <a:r>
-              <a:rPr lang="en-US" b="true" sz="5499">
+              <a:rPr lang="en-US" sz="5499" b="1">
                 <a:solidFill>
                   <a:srgbClr val="FFFFFF"/>
                 </a:solidFill>
@@ -5421,12 +5309,12 @@
       </p:sp>
       <p:sp>
         <p:nvSpPr>
-          <p:cNvPr name="TextBox 10" id="10"/>
-          <p:cNvSpPr txBox="true"/>
+          <p:cNvPr id="10" name="TextBox 10"/>
+          <p:cNvSpPr txBox="1"/>
           <p:nvPr/>
         </p:nvSpPr>
         <p:spPr>
-          <a:xfrm rot="0">
+          <a:xfrm>
             <a:off x="706129" y="2716383"/>
             <a:ext cx="16562696" cy="542925"/>
           </a:xfrm>
@@ -5435,12 +5323,12 @@
           </a:prstGeom>
         </p:spPr>
         <p:txBody>
-          <a:bodyPr anchor="t" rtlCol="false" tIns="0" lIns="0" bIns="0" rIns="0">
+          <a:bodyPr lIns="0" tIns="0" rIns="0" bIns="0" rtlCol="0" anchor="t">
             <a:spAutoFit/>
           </a:bodyPr>
           <a:lstStyle/>
           <a:p>
-            <a:pPr algn="l" marL="755652" indent="-377826" lvl="1">
+            <a:pPr marL="755652" lvl="1" indent="-377826" algn="l">
               <a:lnSpc>
                 <a:spcPts val="4200"/>
               </a:lnSpc>
@@ -5463,7 +5351,7 @@
               <a:t>List the</a:t>
             </a:r>
             <a:r>
-              <a:rPr lang="en-US" b="true" sz="3500">
+              <a:rPr lang="en-US" sz="3500" b="1">
                 <a:solidFill>
                   <a:srgbClr val="03B8E1"/>
                 </a:solidFill>
@@ -5499,7 +5387,7 @@
               <a:t>and explain their role in </a:t>
             </a:r>
             <a:r>
-              <a:rPr lang="en-US" b="true" sz="3500">
+              <a:rPr lang="en-US" sz="3500" b="1">
                 <a:solidFill>
                   <a:srgbClr val="03B8E1"/>
                 </a:solidFill>
@@ -5522,7 +5410,7 @@
 </file>
 
 <file path=ppt/slides/slide6.xml><?xml version="1.0" encoding="utf-8"?>
-<p:sld xmlns:p="http://schemas.openxmlformats.org/presentationml/2006/main" xmlns:a="http://schemas.openxmlformats.org/drawingml/2006/main" xmlns:r="http://schemas.openxmlformats.org/officeDocument/2006/relationships">
+<p:sld xmlns:a="http://schemas.openxmlformats.org/drawingml/2006/main" xmlns:r="http://schemas.openxmlformats.org/officeDocument/2006/relationships" xmlns:p="http://schemas.openxmlformats.org/presentationml/2006/main">
   <p:cSld>
     <p:spTree>
       <p:nvGrpSpPr>
@@ -5540,12 +5428,12 @@
       </p:grpSpPr>
       <p:sp>
         <p:nvSpPr>
-          <p:cNvPr name="Freeform 2" id="2"/>
+          <p:cNvPr id="2" name="Freeform 2"/>
           <p:cNvSpPr/>
           <p:nvPr/>
         </p:nvSpPr>
         <p:spPr>
-          <a:xfrm flipH="false" flipV="false" rot="0">
+          <a:xfrm>
             <a:off x="0" y="-30260"/>
             <a:ext cx="18288000" cy="10317260"/>
           </a:xfrm>
@@ -5554,9 +5442,9 @@
             <a:gdLst/>
             <a:ahLst/>
             <a:cxnLst/>
-            <a:rect r="r" b="b" t="t" l="l"/>
+            <a:rect l="l" t="t" r="r" b="b"/>
             <a:pathLst>
-              <a:path h="10317260" w="18288000">
+              <a:path w="18288000" h="10317260">
                 <a:moveTo>
                   <a:pt x="0" y="0"/>
                 </a:moveTo>
@@ -5579,19 +5467,19 @@
           <a:blipFill>
             <a:blip r:embed="rId2"/>
             <a:stretch>
-              <a:fillRect l="0" t="-12704" r="0" b="-12704"/>
+              <a:fillRect t="-12704" b="-12704"/>
             </a:stretch>
           </a:blipFill>
         </p:spPr>
       </p:sp>
       <p:sp>
         <p:nvSpPr>
-          <p:cNvPr name="Freeform 3" id="3"/>
+          <p:cNvPr id="3" name="Freeform 3"/>
           <p:cNvSpPr/>
           <p:nvPr/>
         </p:nvSpPr>
         <p:spPr>
-          <a:xfrm flipH="false" flipV="false" rot="0">
+          <a:xfrm>
             <a:off x="471693" y="607491"/>
             <a:ext cx="2241928" cy="789345"/>
           </a:xfrm>
@@ -5600,9 +5488,9 @@
             <a:gdLst/>
             <a:ahLst/>
             <a:cxnLst/>
-            <a:rect r="r" b="b" t="t" l="l"/>
+            <a:rect l="l" t="t" r="r" b="b"/>
             <a:pathLst>
-              <a:path h="789345" w="2241928">
+              <a:path w="2241928" h="789345">
                 <a:moveTo>
                   <a:pt x="0" y="0"/>
                 </a:moveTo>
@@ -5631,19 +5519,19 @@
               </a:extLst>
             </a:blip>
             <a:stretch>
-              <a:fillRect l="0" t="0" r="0" b="0"/>
+              <a:fillRect/>
             </a:stretch>
           </a:blipFill>
         </p:spPr>
       </p:sp>
       <p:grpSp>
         <p:nvGrpSpPr>
-          <p:cNvPr name="Group 4" id="4"/>
+          <p:cNvPr id="4" name="Group 4"/>
           <p:cNvGrpSpPr/>
           <p:nvPr/>
         </p:nvGrpSpPr>
         <p:grpSpPr>
-          <a:xfrm rot="0">
+          <a:xfrm>
             <a:off x="471693" y="1897749"/>
             <a:ext cx="17344614" cy="8120173"/>
             <a:chOff x="0" y="0"/>
@@ -5652,12 +5540,12 @@
         </p:grpSpPr>
         <p:sp>
           <p:nvSpPr>
-            <p:cNvPr name="Freeform 5" id="5"/>
+            <p:cNvPr id="5" name="Freeform 5"/>
             <p:cNvSpPr/>
             <p:nvPr/>
           </p:nvSpPr>
           <p:spPr>
-            <a:xfrm flipH="false" flipV="false" rot="0">
+            <a:xfrm>
               <a:off x="0" y="0"/>
               <a:ext cx="4568129" cy="2138647"/>
             </a:xfrm>
@@ -5666,9 +5554,9 @@
               <a:gdLst/>
               <a:ahLst/>
               <a:cxnLst/>
-              <a:rect r="r" b="b" t="t" l="l"/>
+              <a:rect l="l" t="t" r="r" b="b"/>
               <a:pathLst>
-                <a:path h="2138647" w="4568129">
+                <a:path w="4568129" h="2138647">
                   <a:moveTo>
                     <a:pt x="22764" y="0"/>
                   </a:moveTo>
@@ -5737,8 +5625,8 @@
         </p:sp>
         <p:sp>
           <p:nvSpPr>
-            <p:cNvPr name="TextBox 6" id="6"/>
-            <p:cNvSpPr txBox="true"/>
+            <p:cNvPr id="6" name="TextBox 6"/>
+            <p:cNvSpPr txBox="1"/>
             <p:nvPr/>
           </p:nvSpPr>
           <p:spPr>
@@ -5751,7 +5639,7 @@
             </a:prstGeom>
           </p:spPr>
           <p:txBody>
-            <a:bodyPr anchor="ctr" rtlCol="false" tIns="50800" lIns="50800" bIns="50800" rIns="50800"/>
+            <a:bodyPr lIns="50800" tIns="50800" rIns="50800" bIns="50800" rtlCol="0" anchor="ctr"/>
             <a:lstStyle/>
             <a:p>
               <a:pPr algn="ctr">
@@ -5759,18 +5647,19 @@
                   <a:spcPts val="2800"/>
                 </a:lnSpc>
               </a:pPr>
+              <a:endParaRPr/>
             </a:p>
           </p:txBody>
         </p:sp>
       </p:grpSp>
       <p:sp>
         <p:nvSpPr>
-          <p:cNvPr name="TextBox 7" id="7"/>
-          <p:cNvSpPr txBox="true"/>
+          <p:cNvPr id="7" name="TextBox 7"/>
+          <p:cNvSpPr txBox="1"/>
           <p:nvPr/>
         </p:nvSpPr>
         <p:spPr>
-          <a:xfrm rot="0">
+          <a:xfrm>
             <a:off x="771915" y="803726"/>
             <a:ext cx="1641483" cy="349250"/>
           </a:xfrm>
@@ -5779,7 +5668,7 @@
           </a:prstGeom>
         </p:spPr>
         <p:txBody>
-          <a:bodyPr anchor="t" rtlCol="false" tIns="0" lIns="0" bIns="0" rIns="0">
+          <a:bodyPr lIns="0" tIns="0" rIns="0" bIns="0" rtlCol="0" anchor="t">
             <a:spAutoFit/>
           </a:bodyPr>
           <a:lstStyle/>
@@ -5790,7 +5679,7 @@
               </a:lnSpc>
             </a:pPr>
             <a:r>
-              <a:rPr lang="en-US" sz="2000" b="true">
+              <a:rPr lang="en-US" sz="2000" b="1">
                 <a:solidFill>
                   <a:srgbClr val="FFFFFF"/>
                 </a:solidFill>
@@ -5806,12 +5695,12 @@
       </p:sp>
       <p:sp>
         <p:nvSpPr>
-          <p:cNvPr name="Freeform 8" id="8"/>
+          <p:cNvPr id="8" name="Freeform 8"/>
           <p:cNvSpPr/>
           <p:nvPr/>
         </p:nvSpPr>
         <p:spPr>
-          <a:xfrm flipH="false" flipV="false" rot="0">
+          <a:xfrm>
             <a:off x="14279498" y="573541"/>
             <a:ext cx="3536809" cy="823295"/>
           </a:xfrm>
@@ -5820,9 +5709,9 @@
             <a:gdLst/>
             <a:ahLst/>
             <a:cxnLst/>
-            <a:rect r="r" b="b" t="t" l="l"/>
+            <a:rect l="l" t="t" r="r" b="b"/>
             <a:pathLst>
-              <a:path h="823295" w="3536809">
+              <a:path w="3536809" h="823295">
                 <a:moveTo>
                   <a:pt x="0" y="0"/>
                 </a:moveTo>
@@ -5845,19 +5734,19 @@
           <a:blipFill>
             <a:blip r:embed="rId5"/>
             <a:stretch>
-              <a:fillRect l="0" t="0" r="0" b="0"/>
+              <a:fillRect/>
             </a:stretch>
           </a:blipFill>
         </p:spPr>
       </p:sp>
       <p:sp>
         <p:nvSpPr>
-          <p:cNvPr name="TextBox 9" id="9"/>
-          <p:cNvSpPr txBox="true"/>
+          <p:cNvPr id="9" name="TextBox 9"/>
+          <p:cNvSpPr txBox="1"/>
           <p:nvPr/>
         </p:nvSpPr>
         <p:spPr>
-          <a:xfrm rot="0">
+          <a:xfrm>
             <a:off x="6342924" y="568161"/>
             <a:ext cx="5602153" cy="828675"/>
           </a:xfrm>
@@ -5866,7 +5755,7 @@
           </a:prstGeom>
         </p:spPr>
         <p:txBody>
-          <a:bodyPr anchor="t" rtlCol="false" tIns="0" lIns="0" bIns="0" rIns="0">
+          <a:bodyPr lIns="0" tIns="0" rIns="0" bIns="0" rtlCol="0" anchor="t">
             <a:spAutoFit/>
           </a:bodyPr>
           <a:lstStyle/>
@@ -5880,7 +5769,7 @@
               </a:spcBef>
             </a:pPr>
             <a:r>
-              <a:rPr lang="en-US" b="true" sz="5499">
+              <a:rPr lang="en-US" sz="5499" b="1">
                 <a:solidFill>
                   <a:srgbClr val="FFFFFF"/>
                 </a:solidFill>
@@ -5896,12 +5785,12 @@
       </p:sp>
       <p:sp>
         <p:nvSpPr>
-          <p:cNvPr name="TextBox 10" id="10"/>
-          <p:cNvSpPr txBox="true"/>
+          <p:cNvPr id="10" name="TextBox 10"/>
+          <p:cNvSpPr txBox="1"/>
           <p:nvPr/>
         </p:nvSpPr>
         <p:spPr>
-          <a:xfrm rot="0">
+          <a:xfrm>
             <a:off x="708144" y="2716383"/>
             <a:ext cx="16566913" cy="1076325"/>
           </a:xfrm>
@@ -5910,12 +5799,12 @@
           </a:prstGeom>
         </p:spPr>
         <p:txBody>
-          <a:bodyPr anchor="t" rtlCol="false" tIns="0" lIns="0" bIns="0" rIns="0">
+          <a:bodyPr lIns="0" tIns="0" rIns="0" bIns="0" rtlCol="0" anchor="t">
             <a:spAutoFit/>
           </a:bodyPr>
           <a:lstStyle/>
           <a:p>
-            <a:pPr algn="l" marL="755652" indent="-377826" lvl="1">
+            <a:pPr marL="755652" lvl="1" indent="-377826" algn="l">
               <a:lnSpc>
                 <a:spcPts val="4200"/>
               </a:lnSpc>
@@ -5938,7 +5827,7 @@
               <a:t>Present a</a:t>
             </a:r>
             <a:r>
-              <a:rPr lang="en-US" b="true" sz="3500">
+              <a:rPr lang="en-US" sz="3500" b="1">
                 <a:solidFill>
                   <a:srgbClr val="03B8E1"/>
                 </a:solidFill>
@@ -5950,7 +5839,7 @@
               <a:t> flowchart</a:t>
             </a:r>
             <a:r>
-              <a:rPr lang="en-US" b="true" sz="3500">
+              <a:rPr lang="en-US" sz="3500" b="1">
                 <a:solidFill>
                   <a:srgbClr val="000000"/>
                 </a:solidFill>
@@ -5986,7 +5875,7 @@
               <a:t> </a:t>
             </a:r>
             <a:r>
-              <a:rPr lang="en-US" b="true" sz="3500">
+              <a:rPr lang="en-US" sz="3500" b="1">
                 <a:solidFill>
                   <a:srgbClr val="03B8E1"/>
                 </a:solidFill>
@@ -6009,7 +5898,7 @@
 </file>
 
 <file path=ppt/slides/slide7.xml><?xml version="1.0" encoding="utf-8"?>
-<p:sld xmlns:p="http://schemas.openxmlformats.org/presentationml/2006/main" xmlns:a="http://schemas.openxmlformats.org/drawingml/2006/main" xmlns:r="http://schemas.openxmlformats.org/officeDocument/2006/relationships">
+<p:sld xmlns:a="http://schemas.openxmlformats.org/drawingml/2006/main" xmlns:r="http://schemas.openxmlformats.org/officeDocument/2006/relationships" xmlns:p="http://schemas.openxmlformats.org/presentationml/2006/main">
   <p:cSld>
     <p:spTree>
       <p:nvGrpSpPr>
@@ -6027,12 +5916,12 @@
       </p:grpSpPr>
       <p:sp>
         <p:nvSpPr>
-          <p:cNvPr name="Freeform 2" id="2"/>
+          <p:cNvPr id="2" name="Freeform 2"/>
           <p:cNvSpPr/>
           <p:nvPr/>
         </p:nvSpPr>
         <p:spPr>
-          <a:xfrm flipH="false" flipV="false" rot="0">
+          <a:xfrm>
             <a:off x="0" y="-30260"/>
             <a:ext cx="18288000" cy="10317260"/>
           </a:xfrm>
@@ -6041,9 +5930,9 @@
             <a:gdLst/>
             <a:ahLst/>
             <a:cxnLst/>
-            <a:rect r="r" b="b" t="t" l="l"/>
+            <a:rect l="l" t="t" r="r" b="b"/>
             <a:pathLst>
-              <a:path h="10317260" w="18288000">
+              <a:path w="18288000" h="10317260">
                 <a:moveTo>
                   <a:pt x="0" y="0"/>
                 </a:moveTo>
@@ -6066,19 +5955,19 @@
           <a:blipFill>
             <a:blip r:embed="rId2"/>
             <a:stretch>
-              <a:fillRect l="0" t="-12704" r="0" b="-12704"/>
+              <a:fillRect t="-12704" b="-12704"/>
             </a:stretch>
           </a:blipFill>
         </p:spPr>
       </p:sp>
       <p:sp>
         <p:nvSpPr>
-          <p:cNvPr name="Freeform 3" id="3"/>
+          <p:cNvPr id="3" name="Freeform 3"/>
           <p:cNvSpPr/>
           <p:nvPr/>
         </p:nvSpPr>
         <p:spPr>
-          <a:xfrm flipH="false" flipV="false" rot="0">
+          <a:xfrm>
             <a:off x="471693" y="607491"/>
             <a:ext cx="2241928" cy="789345"/>
           </a:xfrm>
@@ -6087,9 +5976,9 @@
             <a:gdLst/>
             <a:ahLst/>
             <a:cxnLst/>
-            <a:rect r="r" b="b" t="t" l="l"/>
+            <a:rect l="l" t="t" r="r" b="b"/>
             <a:pathLst>
-              <a:path h="789345" w="2241928">
+              <a:path w="2241928" h="789345">
                 <a:moveTo>
                   <a:pt x="0" y="0"/>
                 </a:moveTo>
@@ -6118,19 +6007,19 @@
               </a:extLst>
             </a:blip>
             <a:stretch>
-              <a:fillRect l="0" t="0" r="0" b="0"/>
+              <a:fillRect/>
             </a:stretch>
           </a:blipFill>
         </p:spPr>
       </p:sp>
       <p:grpSp>
         <p:nvGrpSpPr>
-          <p:cNvPr name="Group 4" id="4"/>
+          <p:cNvPr id="4" name="Group 4"/>
           <p:cNvGrpSpPr/>
           <p:nvPr/>
         </p:nvGrpSpPr>
         <p:grpSpPr>
-          <a:xfrm rot="0">
+          <a:xfrm>
             <a:off x="471693" y="1897749"/>
             <a:ext cx="17344614" cy="8120173"/>
             <a:chOff x="0" y="0"/>
@@ -6139,12 +6028,12 @@
         </p:grpSpPr>
         <p:sp>
           <p:nvSpPr>
-            <p:cNvPr name="Freeform 5" id="5"/>
+            <p:cNvPr id="5" name="Freeform 5"/>
             <p:cNvSpPr/>
             <p:nvPr/>
           </p:nvSpPr>
           <p:spPr>
-            <a:xfrm flipH="false" flipV="false" rot="0">
+            <a:xfrm>
               <a:off x="0" y="0"/>
               <a:ext cx="4568129" cy="2138647"/>
             </a:xfrm>
@@ -6153,9 +6042,9 @@
               <a:gdLst/>
               <a:ahLst/>
               <a:cxnLst/>
-              <a:rect r="r" b="b" t="t" l="l"/>
+              <a:rect l="l" t="t" r="r" b="b"/>
               <a:pathLst>
-                <a:path h="2138647" w="4568129">
+                <a:path w="4568129" h="2138647">
                   <a:moveTo>
                     <a:pt x="22764" y="0"/>
                   </a:moveTo>
@@ -6224,8 +6113,8 @@
         </p:sp>
         <p:sp>
           <p:nvSpPr>
-            <p:cNvPr name="TextBox 6" id="6"/>
-            <p:cNvSpPr txBox="true"/>
+            <p:cNvPr id="6" name="TextBox 6"/>
+            <p:cNvSpPr txBox="1"/>
             <p:nvPr/>
           </p:nvSpPr>
           <p:spPr>
@@ -6238,7 +6127,7 @@
             </a:prstGeom>
           </p:spPr>
           <p:txBody>
-            <a:bodyPr anchor="ctr" rtlCol="false" tIns="50800" lIns="50800" bIns="50800" rIns="50800"/>
+            <a:bodyPr lIns="50800" tIns="50800" rIns="50800" bIns="50800" rtlCol="0" anchor="ctr"/>
             <a:lstStyle/>
             <a:p>
               <a:pPr algn="ctr">
@@ -6246,18 +6135,19 @@
                   <a:spcPts val="2800"/>
                 </a:lnSpc>
               </a:pPr>
+              <a:endParaRPr/>
             </a:p>
           </p:txBody>
         </p:sp>
       </p:grpSp>
       <p:sp>
         <p:nvSpPr>
-          <p:cNvPr name="TextBox 7" id="7"/>
-          <p:cNvSpPr txBox="true"/>
+          <p:cNvPr id="7" name="TextBox 7"/>
+          <p:cNvSpPr txBox="1"/>
           <p:nvPr/>
         </p:nvSpPr>
         <p:spPr>
-          <a:xfrm rot="0">
+          <a:xfrm>
             <a:off x="748047" y="803726"/>
             <a:ext cx="1689219" cy="349250"/>
           </a:xfrm>
@@ -6266,7 +6156,7 @@
           </a:prstGeom>
         </p:spPr>
         <p:txBody>
-          <a:bodyPr anchor="t" rtlCol="false" tIns="0" lIns="0" bIns="0" rIns="0">
+          <a:bodyPr lIns="0" tIns="0" rIns="0" bIns="0" rtlCol="0" anchor="t">
             <a:spAutoFit/>
           </a:bodyPr>
           <a:lstStyle/>
@@ -6277,7 +6167,7 @@
               </a:lnSpc>
             </a:pPr>
             <a:r>
-              <a:rPr lang="en-US" sz="2000" b="true">
+              <a:rPr lang="en-US" sz="2000" b="1">
                 <a:solidFill>
                   <a:srgbClr val="FFFFFF"/>
                 </a:solidFill>
@@ -6293,12 +6183,12 @@
       </p:sp>
       <p:sp>
         <p:nvSpPr>
-          <p:cNvPr name="Freeform 8" id="8"/>
+          <p:cNvPr id="8" name="Freeform 8"/>
           <p:cNvSpPr/>
           <p:nvPr/>
         </p:nvSpPr>
         <p:spPr>
-          <a:xfrm flipH="false" flipV="false" rot="0">
+          <a:xfrm>
             <a:off x="14279498" y="573541"/>
             <a:ext cx="3536809" cy="823295"/>
           </a:xfrm>
@@ -6307,9 +6197,9 @@
             <a:gdLst/>
             <a:ahLst/>
             <a:cxnLst/>
-            <a:rect r="r" b="b" t="t" l="l"/>
+            <a:rect l="l" t="t" r="r" b="b"/>
             <a:pathLst>
-              <a:path h="823295" w="3536809">
+              <a:path w="3536809" h="823295">
                 <a:moveTo>
                   <a:pt x="0" y="0"/>
                 </a:moveTo>
@@ -6332,19 +6222,19 @@
           <a:blipFill>
             <a:blip r:embed="rId5"/>
             <a:stretch>
-              <a:fillRect l="0" t="0" r="0" b="0"/>
+              <a:fillRect/>
             </a:stretch>
           </a:blipFill>
         </p:spPr>
       </p:sp>
       <p:sp>
         <p:nvSpPr>
-          <p:cNvPr name="TextBox 9" id="9"/>
-          <p:cNvSpPr txBox="true"/>
+          <p:cNvPr id="9" name="TextBox 9"/>
+          <p:cNvSpPr txBox="1"/>
           <p:nvPr/>
         </p:nvSpPr>
         <p:spPr>
-          <a:xfrm rot="0">
+          <a:xfrm>
             <a:off x="3992087" y="597966"/>
             <a:ext cx="9751377" cy="695325"/>
           </a:xfrm>
@@ -6353,7 +6243,7 @@
           </a:prstGeom>
         </p:spPr>
         <p:txBody>
-          <a:bodyPr anchor="t" rtlCol="false" tIns="0" lIns="0" bIns="0" rIns="0">
+          <a:bodyPr lIns="0" tIns="0" rIns="0" bIns="0" rtlCol="0" anchor="t">
             <a:spAutoFit/>
           </a:bodyPr>
           <a:lstStyle/>
@@ -6367,7 +6257,7 @@
               </a:spcBef>
             </a:pPr>
             <a:r>
-              <a:rPr lang="en-US" b="true" sz="4500">
+              <a:rPr lang="en-US" sz="4500" b="1">
                 <a:solidFill>
                   <a:srgbClr val="FFFFFF"/>
                 </a:solidFill>
@@ -6383,12 +6273,12 @@
       </p:sp>
       <p:sp>
         <p:nvSpPr>
-          <p:cNvPr name="TextBox 10" id="10"/>
-          <p:cNvSpPr txBox="true"/>
+          <p:cNvPr id="10" name="TextBox 10"/>
+          <p:cNvSpPr txBox="1"/>
           <p:nvPr/>
         </p:nvSpPr>
         <p:spPr>
-          <a:xfrm rot="0">
+          <a:xfrm>
             <a:off x="705463" y="2716383"/>
             <a:ext cx="16391912" cy="2676525"/>
           </a:xfrm>
@@ -6397,12 +6287,12 @@
           </a:prstGeom>
         </p:spPr>
         <p:txBody>
-          <a:bodyPr anchor="t" rtlCol="false" tIns="0" lIns="0" bIns="0" rIns="0">
+          <a:bodyPr lIns="0" tIns="0" rIns="0" bIns="0" rtlCol="0" anchor="t">
             <a:spAutoFit/>
           </a:bodyPr>
           <a:lstStyle/>
           <a:p>
-            <a:pPr algn="l" marL="755652" indent="-377826" lvl="1">
+            <a:pPr marL="755652" lvl="1" indent="-377826" algn="l">
               <a:lnSpc>
                 <a:spcPts val="4200"/>
               </a:lnSpc>
@@ -6413,7 +6303,7 @@
               <a:buChar char="•"/>
             </a:pPr>
             <a:r>
-              <a:rPr lang="en-US" b="true" sz="3500">
+              <a:rPr lang="en-US" sz="3500" b="1">
                 <a:solidFill>
                   <a:srgbClr val="03B8E1"/>
                 </a:solidFill>
@@ -6446,23 +6336,11 @@
                 <a:cs typeface="Neue Montreal"/>
                 <a:sym typeface="Neue Montreal"/>
               </a:rPr>
-              <a:t>Explain how the solution benefits society, improves lives, or addresses a critical issue in the chosen area of f</a:t>
-            </a:r>
-            <a:r>
-              <a:rPr lang="en-US" sz="3500">
-                <a:solidFill>
-                  <a:srgbClr val="000000"/>
-                </a:solidFill>
-                <a:latin typeface="Neue Montreal"/>
-                <a:ea typeface="Neue Montreal"/>
-                <a:cs typeface="Neue Montreal"/>
-                <a:sym typeface="Neue Montreal"/>
-              </a:rPr>
-              <a:t>ocus.</a:t>
-            </a:r>
-          </a:p>
-          <a:p>
-            <a:pPr algn="l" marL="755652" indent="-377826" lvl="1">
+              <a:t>Explain how the solution benefits society, improves lives, or addresses a critical issue in the chosen area of focus.</a:t>
+            </a:r>
+          </a:p>
+          <a:p>
+            <a:pPr marL="755652" lvl="1" indent="-377826" algn="l">
               <a:lnSpc>
                 <a:spcPts val="4200"/>
               </a:lnSpc>
@@ -6473,7 +6351,7 @@
               <a:buChar char="•"/>
             </a:pPr>
             <a:r>
-              <a:rPr lang="en-US" b="true" sz="3500">
+              <a:rPr lang="en-US" sz="3500" b="1">
                 <a:solidFill>
                   <a:srgbClr val="03B8E1"/>
                 </a:solidFill>
@@ -6506,6 +6384,15 @@
                 <a:spcPct val="0"/>
               </a:spcBef>
             </a:pPr>
+            <a:endParaRPr lang="en-US" sz="3500">
+              <a:solidFill>
+                <a:srgbClr val="000000"/>
+              </a:solidFill>
+              <a:latin typeface="Neue Montreal"/>
+              <a:ea typeface="Neue Montreal"/>
+              <a:cs typeface="Neue Montreal"/>
+              <a:sym typeface="Neue Montreal"/>
+            </a:endParaRPr>
           </a:p>
         </p:txBody>
       </p:sp>
@@ -6518,7 +6405,7 @@
 </file>
 
 <file path=ppt/slides/slide8.xml><?xml version="1.0" encoding="utf-8"?>
-<p:sld xmlns:p="http://schemas.openxmlformats.org/presentationml/2006/main" xmlns:a="http://schemas.openxmlformats.org/drawingml/2006/main" xmlns:r="http://schemas.openxmlformats.org/officeDocument/2006/relationships">
+<p:sld xmlns:a="http://schemas.openxmlformats.org/drawingml/2006/main" xmlns:r="http://schemas.openxmlformats.org/officeDocument/2006/relationships" xmlns:p="http://schemas.openxmlformats.org/presentationml/2006/main">
   <p:cSld>
     <p:spTree>
       <p:nvGrpSpPr>
@@ -6536,12 +6423,12 @@
       </p:grpSpPr>
       <p:sp>
         <p:nvSpPr>
-          <p:cNvPr name="Freeform 2" id="2"/>
+          <p:cNvPr id="2" name="Freeform 2"/>
           <p:cNvSpPr/>
           <p:nvPr/>
         </p:nvSpPr>
         <p:spPr>
-          <a:xfrm flipH="false" flipV="false" rot="0">
+          <a:xfrm>
             <a:off x="0" y="-30260"/>
             <a:ext cx="18288000" cy="10317260"/>
           </a:xfrm>
@@ -6550,9 +6437,9 @@
             <a:gdLst/>
             <a:ahLst/>
             <a:cxnLst/>
-            <a:rect r="r" b="b" t="t" l="l"/>
+            <a:rect l="l" t="t" r="r" b="b"/>
             <a:pathLst>
-              <a:path h="10317260" w="18288000">
+              <a:path w="18288000" h="10317260">
                 <a:moveTo>
                   <a:pt x="0" y="0"/>
                 </a:moveTo>
@@ -6575,19 +6462,19 @@
           <a:blipFill>
             <a:blip r:embed="rId2"/>
             <a:stretch>
-              <a:fillRect l="0" t="-12704" r="0" b="-12704"/>
+              <a:fillRect t="-12704" b="-12704"/>
             </a:stretch>
           </a:blipFill>
         </p:spPr>
       </p:sp>
       <p:sp>
         <p:nvSpPr>
-          <p:cNvPr name="Freeform 3" id="3"/>
+          <p:cNvPr id="3" name="Freeform 3"/>
           <p:cNvSpPr/>
           <p:nvPr/>
         </p:nvSpPr>
         <p:spPr>
-          <a:xfrm flipH="false" flipV="false" rot="0">
+          <a:xfrm>
             <a:off x="471693" y="607491"/>
             <a:ext cx="2241928" cy="789345"/>
           </a:xfrm>
@@ -6596,9 +6483,9 @@
             <a:gdLst/>
             <a:ahLst/>
             <a:cxnLst/>
-            <a:rect r="r" b="b" t="t" l="l"/>
+            <a:rect l="l" t="t" r="r" b="b"/>
             <a:pathLst>
-              <a:path h="789345" w="2241928">
+              <a:path w="2241928" h="789345">
                 <a:moveTo>
                   <a:pt x="0" y="0"/>
                 </a:moveTo>
@@ -6627,19 +6514,19 @@
               </a:extLst>
             </a:blip>
             <a:stretch>
-              <a:fillRect l="0" t="0" r="0" b="0"/>
+              <a:fillRect/>
             </a:stretch>
           </a:blipFill>
         </p:spPr>
       </p:sp>
       <p:grpSp>
         <p:nvGrpSpPr>
-          <p:cNvPr name="Group 4" id="4"/>
+          <p:cNvPr id="4" name="Group 4"/>
           <p:cNvGrpSpPr/>
           <p:nvPr/>
         </p:nvGrpSpPr>
         <p:grpSpPr>
-          <a:xfrm rot="0">
+          <a:xfrm>
             <a:off x="471693" y="1897749"/>
             <a:ext cx="17344614" cy="8120173"/>
             <a:chOff x="0" y="0"/>
@@ -6648,12 +6535,12 @@
         </p:grpSpPr>
         <p:sp>
           <p:nvSpPr>
-            <p:cNvPr name="Freeform 5" id="5"/>
+            <p:cNvPr id="5" name="Freeform 5"/>
             <p:cNvSpPr/>
             <p:nvPr/>
           </p:nvSpPr>
           <p:spPr>
-            <a:xfrm flipH="false" flipV="false" rot="0">
+            <a:xfrm>
               <a:off x="0" y="0"/>
               <a:ext cx="4568129" cy="2138647"/>
             </a:xfrm>
@@ -6662,9 +6549,9 @@
               <a:gdLst/>
               <a:ahLst/>
               <a:cxnLst/>
-              <a:rect r="r" b="b" t="t" l="l"/>
+              <a:rect l="l" t="t" r="r" b="b"/>
               <a:pathLst>
-                <a:path h="2138647" w="4568129">
+                <a:path w="4568129" h="2138647">
                   <a:moveTo>
                     <a:pt x="22764" y="0"/>
                   </a:moveTo>
@@ -6733,8 +6620,8 @@
         </p:sp>
         <p:sp>
           <p:nvSpPr>
-            <p:cNvPr name="TextBox 6" id="6"/>
-            <p:cNvSpPr txBox="true"/>
+            <p:cNvPr id="6" name="TextBox 6"/>
+            <p:cNvSpPr txBox="1"/>
             <p:nvPr/>
           </p:nvSpPr>
           <p:spPr>
@@ -6747,7 +6634,7 @@
             </a:prstGeom>
           </p:spPr>
           <p:txBody>
-            <a:bodyPr anchor="ctr" rtlCol="false" tIns="50800" lIns="50800" bIns="50800" rIns="50800"/>
+            <a:bodyPr lIns="50800" tIns="50800" rIns="50800" bIns="50800" rtlCol="0" anchor="ctr"/>
             <a:lstStyle/>
             <a:p>
               <a:pPr algn="ctr">
@@ -6755,27 +6642,28 @@
                   <a:spcPts val="2800"/>
                 </a:lnSpc>
               </a:pPr>
+              <a:endParaRPr/>
             </a:p>
           </p:txBody>
         </p:sp>
       </p:grpSp>
       <p:sp>
         <p:nvSpPr>
-          <p:cNvPr name="TextBox 7" id="7"/>
-          <p:cNvSpPr txBox="true"/>
+          <p:cNvPr id="7" name="TextBox 7"/>
+          <p:cNvSpPr txBox="1"/>
           <p:nvPr/>
         </p:nvSpPr>
         <p:spPr>
-          <a:xfrm rot="0">
+          <a:xfrm>
             <a:off x="867388" y="803726"/>
-            <a:ext cx="1450538" cy="349250"/>
+            <a:ext cx="1571012" cy="335541"/>
           </a:xfrm>
           <a:prstGeom prst="rect">
             <a:avLst/>
           </a:prstGeom>
         </p:spPr>
         <p:txBody>
-          <a:bodyPr anchor="t" rtlCol="false" tIns="0" lIns="0" bIns="0" rIns="0">
+          <a:bodyPr wrap="square" lIns="0" tIns="0" rIns="0" bIns="0" rtlCol="0" anchor="t">
             <a:spAutoFit/>
           </a:bodyPr>
           <a:lstStyle/>
@@ -6786,7 +6674,7 @@
               </a:lnSpc>
             </a:pPr>
             <a:r>
-              <a:rPr lang="en-US" sz="2000" b="true">
+              <a:rPr lang="en-US" sz="2000" b="1" dirty="0">
                 <a:solidFill>
                   <a:srgbClr val="FFFFFF"/>
                 </a:solidFill>
@@ -6802,12 +6690,12 @@
       </p:sp>
       <p:sp>
         <p:nvSpPr>
-          <p:cNvPr name="Freeform 8" id="8"/>
+          <p:cNvPr id="8" name="Freeform 8"/>
           <p:cNvSpPr/>
           <p:nvPr/>
         </p:nvSpPr>
         <p:spPr>
-          <a:xfrm flipH="false" flipV="false" rot="0">
+          <a:xfrm>
             <a:off x="14279498" y="573541"/>
             <a:ext cx="3536809" cy="823295"/>
           </a:xfrm>
@@ -6816,9 +6704,9 @@
             <a:gdLst/>
             <a:ahLst/>
             <a:cxnLst/>
-            <a:rect r="r" b="b" t="t" l="l"/>
+            <a:rect l="l" t="t" r="r" b="b"/>
             <a:pathLst>
-              <a:path h="823295" w="3536809">
+              <a:path w="3536809" h="823295">
                 <a:moveTo>
                   <a:pt x="0" y="0"/>
                 </a:moveTo>
@@ -6841,19 +6729,19 @@
           <a:blipFill>
             <a:blip r:embed="rId5"/>
             <a:stretch>
-              <a:fillRect l="0" t="0" r="0" b="0"/>
+              <a:fillRect/>
             </a:stretch>
           </a:blipFill>
         </p:spPr>
       </p:sp>
       <p:sp>
         <p:nvSpPr>
-          <p:cNvPr name="TextBox 9" id="9"/>
-          <p:cNvSpPr txBox="true"/>
+          <p:cNvPr id="9" name="TextBox 9"/>
+          <p:cNvSpPr txBox="1"/>
           <p:nvPr/>
         </p:nvSpPr>
         <p:spPr>
-          <a:xfrm rot="0">
+          <a:xfrm>
             <a:off x="6106681" y="607491"/>
             <a:ext cx="6074638" cy="828675"/>
           </a:xfrm>
@@ -6862,7 +6750,7 @@
           </a:prstGeom>
         </p:spPr>
         <p:txBody>
-          <a:bodyPr anchor="t" rtlCol="false" tIns="0" lIns="0" bIns="0" rIns="0">
+          <a:bodyPr lIns="0" tIns="0" rIns="0" bIns="0" rtlCol="0" anchor="t">
             <a:spAutoFit/>
           </a:bodyPr>
           <a:lstStyle/>
@@ -6876,7 +6764,7 @@
               </a:spcBef>
             </a:pPr>
             <a:r>
-              <a:rPr lang="en-US" b="true" sz="5499">
+              <a:rPr lang="en-US" sz="5499" b="1">
                 <a:solidFill>
                   <a:srgbClr val="FFFFFF"/>
                 </a:solidFill>
